--- a/Enterprise_RAG_Presentation.pptx
+++ b/Enterprise_RAG_Presentation.pptx
@@ -8,11 +8,12 @@
     <p:sldId id="269" r:id="rId2"/>
     <p:sldId id="270" r:id="rId3"/>
     <p:sldId id="272" r:id="rId4"/>
-    <p:sldId id="274" r:id="rId5"/>
-    <p:sldId id="268" r:id="rId6"/>
-    <p:sldId id="266" r:id="rId7"/>
-    <p:sldId id="275" r:id="rId8"/>
-    <p:sldId id="267" r:id="rId9"/>
+    <p:sldId id="276" r:id="rId5"/>
+    <p:sldId id="274" r:id="rId6"/>
+    <p:sldId id="268" r:id="rId7"/>
+    <p:sldId id="266" r:id="rId8"/>
+    <p:sldId id="275" r:id="rId9"/>
+    <p:sldId id="267" r:id="rId10"/>
   </p:sldIdLst>
   <p:sldSz cx="12192000" cy="6858000"/>
   <p:notesSz cx="6858000" cy="9144000"/>
@@ -1613,7 +1614,1297 @@
 </dgm:colorsDef>
 </file>
 
+<file path=ppt/diagrams/colors3.xml><?xml version="1.0" encoding="utf-8"?>
+<dgm:colorsDef xmlns:dgm="http://schemas.openxmlformats.org/drawingml/2006/diagram" xmlns:a="http://schemas.openxmlformats.org/drawingml/2006/main" uniqueId="urn:microsoft.com/office/officeart/2005/8/colors/accent1_2">
+  <dgm:title val=""/>
+  <dgm:desc val=""/>
+  <dgm:catLst>
+    <dgm:cat type="accent1" pri="11200"/>
+  </dgm:catLst>
+  <dgm:styleLbl name="node0">
+    <dgm:fillClrLst meth="repeat">
+      <a:schemeClr val="accent1"/>
+    </dgm:fillClrLst>
+    <dgm:linClrLst meth="repeat">
+      <a:schemeClr val="lt1"/>
+    </dgm:linClrLst>
+    <dgm:effectClrLst/>
+    <dgm:txLinClrLst/>
+    <dgm:txFillClrLst/>
+    <dgm:txEffectClrLst/>
+  </dgm:styleLbl>
+  <dgm:styleLbl name="alignNode1">
+    <dgm:fillClrLst meth="repeat">
+      <a:schemeClr val="accent1"/>
+    </dgm:fillClrLst>
+    <dgm:linClrLst meth="repeat">
+      <a:schemeClr val="accent1"/>
+    </dgm:linClrLst>
+    <dgm:effectClrLst/>
+    <dgm:txLinClrLst/>
+    <dgm:txFillClrLst/>
+    <dgm:txEffectClrLst/>
+  </dgm:styleLbl>
+  <dgm:styleLbl name="node1">
+    <dgm:fillClrLst meth="repeat">
+      <a:schemeClr val="accent1"/>
+    </dgm:fillClrLst>
+    <dgm:linClrLst meth="repeat">
+      <a:schemeClr val="lt1"/>
+    </dgm:linClrLst>
+    <dgm:effectClrLst/>
+    <dgm:txLinClrLst/>
+    <dgm:txFillClrLst/>
+    <dgm:txEffectClrLst/>
+  </dgm:styleLbl>
+  <dgm:styleLbl name="lnNode1">
+    <dgm:fillClrLst meth="repeat">
+      <a:schemeClr val="accent1"/>
+    </dgm:fillClrLst>
+    <dgm:linClrLst meth="repeat">
+      <a:schemeClr val="lt1"/>
+    </dgm:linClrLst>
+    <dgm:effectClrLst/>
+    <dgm:txLinClrLst/>
+    <dgm:txFillClrLst/>
+    <dgm:txEffectClrLst/>
+  </dgm:styleLbl>
+  <dgm:styleLbl name="vennNode1">
+    <dgm:fillClrLst meth="repeat">
+      <a:schemeClr val="accent1">
+        <a:alpha val="50000"/>
+      </a:schemeClr>
+    </dgm:fillClrLst>
+    <dgm:linClrLst meth="repeat">
+      <a:schemeClr val="lt1"/>
+    </dgm:linClrLst>
+    <dgm:effectClrLst/>
+    <dgm:txLinClrLst/>
+    <dgm:txFillClrLst/>
+    <dgm:txEffectClrLst/>
+  </dgm:styleLbl>
+  <dgm:styleLbl name="node2">
+    <dgm:fillClrLst meth="repeat">
+      <a:schemeClr val="accent1"/>
+    </dgm:fillClrLst>
+    <dgm:linClrLst meth="repeat">
+      <a:schemeClr val="lt1"/>
+    </dgm:linClrLst>
+    <dgm:effectClrLst/>
+    <dgm:txLinClrLst/>
+    <dgm:txFillClrLst/>
+    <dgm:txEffectClrLst/>
+  </dgm:styleLbl>
+  <dgm:styleLbl name="node3">
+    <dgm:fillClrLst meth="repeat">
+      <a:schemeClr val="accent1"/>
+    </dgm:fillClrLst>
+    <dgm:linClrLst meth="repeat">
+      <a:schemeClr val="lt1"/>
+    </dgm:linClrLst>
+    <dgm:effectClrLst/>
+    <dgm:txLinClrLst/>
+    <dgm:txFillClrLst/>
+    <dgm:txEffectClrLst/>
+  </dgm:styleLbl>
+  <dgm:styleLbl name="node4">
+    <dgm:fillClrLst meth="repeat">
+      <a:schemeClr val="accent1"/>
+    </dgm:fillClrLst>
+    <dgm:linClrLst meth="repeat">
+      <a:schemeClr val="lt1"/>
+    </dgm:linClrLst>
+    <dgm:effectClrLst/>
+    <dgm:txLinClrLst/>
+    <dgm:txFillClrLst/>
+    <dgm:txEffectClrLst/>
+  </dgm:styleLbl>
+  <dgm:styleLbl name="fgImgPlace1">
+    <dgm:fillClrLst meth="repeat">
+      <a:schemeClr val="accent1">
+        <a:tint val="50000"/>
+      </a:schemeClr>
+    </dgm:fillClrLst>
+    <dgm:linClrLst meth="repeat">
+      <a:schemeClr val="lt1"/>
+    </dgm:linClrLst>
+    <dgm:effectClrLst/>
+    <dgm:txLinClrLst/>
+    <dgm:txFillClrLst meth="repeat">
+      <a:schemeClr val="lt1"/>
+    </dgm:txFillClrLst>
+    <dgm:txEffectClrLst/>
+  </dgm:styleLbl>
+  <dgm:styleLbl name="alignImgPlace1">
+    <dgm:fillClrLst meth="repeat">
+      <a:schemeClr val="accent1">
+        <a:tint val="50000"/>
+      </a:schemeClr>
+    </dgm:fillClrLst>
+    <dgm:linClrLst meth="repeat">
+      <a:schemeClr val="lt1"/>
+    </dgm:linClrLst>
+    <dgm:effectClrLst/>
+    <dgm:txLinClrLst/>
+    <dgm:txFillClrLst meth="repeat">
+      <a:schemeClr val="lt1"/>
+    </dgm:txFillClrLst>
+    <dgm:txEffectClrLst/>
+  </dgm:styleLbl>
+  <dgm:styleLbl name="bgImgPlace1">
+    <dgm:fillClrLst meth="repeat">
+      <a:schemeClr val="accent1">
+        <a:tint val="50000"/>
+      </a:schemeClr>
+    </dgm:fillClrLst>
+    <dgm:linClrLst meth="repeat">
+      <a:schemeClr val="lt1"/>
+    </dgm:linClrLst>
+    <dgm:effectClrLst/>
+    <dgm:txLinClrLst/>
+    <dgm:txFillClrLst meth="repeat">
+      <a:schemeClr val="lt1"/>
+    </dgm:txFillClrLst>
+    <dgm:txEffectClrLst/>
+  </dgm:styleLbl>
+  <dgm:styleLbl name="sibTrans2D1">
+    <dgm:fillClrLst meth="repeat">
+      <a:schemeClr val="accent1">
+        <a:tint val="60000"/>
+      </a:schemeClr>
+    </dgm:fillClrLst>
+    <dgm:linClrLst meth="repeat">
+      <a:schemeClr val="accent1">
+        <a:tint val="60000"/>
+      </a:schemeClr>
+    </dgm:linClrLst>
+    <dgm:effectClrLst/>
+    <dgm:txLinClrLst/>
+    <dgm:txFillClrLst/>
+    <dgm:txEffectClrLst/>
+  </dgm:styleLbl>
+  <dgm:styleLbl name="fgSibTrans2D1">
+    <dgm:fillClrLst meth="repeat">
+      <a:schemeClr val="accent1">
+        <a:tint val="60000"/>
+      </a:schemeClr>
+    </dgm:fillClrLst>
+    <dgm:linClrLst meth="repeat">
+      <a:schemeClr val="accent1">
+        <a:tint val="60000"/>
+      </a:schemeClr>
+    </dgm:linClrLst>
+    <dgm:effectClrLst/>
+    <dgm:txLinClrLst/>
+    <dgm:txFillClrLst/>
+    <dgm:txEffectClrLst/>
+  </dgm:styleLbl>
+  <dgm:styleLbl name="bgSibTrans2D1">
+    <dgm:fillClrLst meth="repeat">
+      <a:schemeClr val="accent1">
+        <a:tint val="60000"/>
+      </a:schemeClr>
+    </dgm:fillClrLst>
+    <dgm:linClrLst meth="repeat">
+      <a:schemeClr val="accent1">
+        <a:tint val="60000"/>
+      </a:schemeClr>
+    </dgm:linClrLst>
+    <dgm:effectClrLst/>
+    <dgm:txLinClrLst/>
+    <dgm:txFillClrLst/>
+    <dgm:txEffectClrLst/>
+  </dgm:styleLbl>
+  <dgm:styleLbl name="sibTrans1D1">
+    <dgm:fillClrLst meth="repeat">
+      <a:schemeClr val="accent1"/>
+    </dgm:fillClrLst>
+    <dgm:linClrLst meth="repeat">
+      <a:schemeClr val="accent1"/>
+    </dgm:linClrLst>
+    <dgm:effectClrLst/>
+    <dgm:txLinClrLst/>
+    <dgm:txFillClrLst meth="repeat">
+      <a:schemeClr val="tx1"/>
+    </dgm:txFillClrLst>
+    <dgm:txEffectClrLst/>
+  </dgm:styleLbl>
+  <dgm:styleLbl name="callout">
+    <dgm:fillClrLst meth="repeat">
+      <a:schemeClr val="accent1"/>
+    </dgm:fillClrLst>
+    <dgm:linClrLst meth="repeat">
+      <a:schemeClr val="accent1">
+        <a:tint val="50000"/>
+      </a:schemeClr>
+    </dgm:linClrLst>
+    <dgm:effectClrLst/>
+    <dgm:txLinClrLst/>
+    <dgm:txFillClrLst meth="repeat">
+      <a:schemeClr val="tx1"/>
+    </dgm:txFillClrLst>
+    <dgm:txEffectClrLst/>
+  </dgm:styleLbl>
+  <dgm:styleLbl name="asst0">
+    <dgm:fillClrLst meth="repeat">
+      <a:schemeClr val="accent1"/>
+    </dgm:fillClrLst>
+    <dgm:linClrLst meth="repeat">
+      <a:schemeClr val="lt1"/>
+    </dgm:linClrLst>
+    <dgm:effectClrLst/>
+    <dgm:txLinClrLst/>
+    <dgm:txFillClrLst/>
+    <dgm:txEffectClrLst/>
+  </dgm:styleLbl>
+  <dgm:styleLbl name="asst1">
+    <dgm:fillClrLst meth="repeat">
+      <a:schemeClr val="accent1"/>
+    </dgm:fillClrLst>
+    <dgm:linClrLst meth="repeat">
+      <a:schemeClr val="lt1"/>
+    </dgm:linClrLst>
+    <dgm:effectClrLst/>
+    <dgm:txLinClrLst/>
+    <dgm:txFillClrLst/>
+    <dgm:txEffectClrLst/>
+  </dgm:styleLbl>
+  <dgm:styleLbl name="asst2">
+    <dgm:fillClrLst meth="repeat">
+      <a:schemeClr val="accent1"/>
+    </dgm:fillClrLst>
+    <dgm:linClrLst meth="repeat">
+      <a:schemeClr val="lt1"/>
+    </dgm:linClrLst>
+    <dgm:effectClrLst/>
+    <dgm:txLinClrLst/>
+    <dgm:txFillClrLst/>
+    <dgm:txEffectClrLst/>
+  </dgm:styleLbl>
+  <dgm:styleLbl name="asst3">
+    <dgm:fillClrLst meth="repeat">
+      <a:schemeClr val="accent1"/>
+    </dgm:fillClrLst>
+    <dgm:linClrLst meth="repeat">
+      <a:schemeClr val="lt1"/>
+    </dgm:linClrLst>
+    <dgm:effectClrLst/>
+    <dgm:txLinClrLst/>
+    <dgm:txFillClrLst/>
+    <dgm:txEffectClrLst/>
+  </dgm:styleLbl>
+  <dgm:styleLbl name="asst4">
+    <dgm:fillClrLst meth="repeat">
+      <a:schemeClr val="accent1"/>
+    </dgm:fillClrLst>
+    <dgm:linClrLst meth="repeat">
+      <a:schemeClr val="lt1"/>
+    </dgm:linClrLst>
+    <dgm:effectClrLst/>
+    <dgm:txLinClrLst/>
+    <dgm:txFillClrLst/>
+    <dgm:txEffectClrLst/>
+  </dgm:styleLbl>
+  <dgm:styleLbl name="parChTrans2D1">
+    <dgm:fillClrLst meth="repeat">
+      <a:schemeClr val="accent1">
+        <a:tint val="60000"/>
+      </a:schemeClr>
+    </dgm:fillClrLst>
+    <dgm:linClrLst meth="repeat">
+      <a:schemeClr val="accent1">
+        <a:tint val="60000"/>
+      </a:schemeClr>
+    </dgm:linClrLst>
+    <dgm:effectClrLst/>
+    <dgm:txLinClrLst/>
+    <dgm:txFillClrLst meth="repeat">
+      <a:schemeClr val="lt1"/>
+    </dgm:txFillClrLst>
+    <dgm:txEffectClrLst/>
+  </dgm:styleLbl>
+  <dgm:styleLbl name="parChTrans2D2">
+    <dgm:fillClrLst meth="repeat">
+      <a:schemeClr val="accent1"/>
+    </dgm:fillClrLst>
+    <dgm:linClrLst meth="repeat">
+      <a:schemeClr val="accent1"/>
+    </dgm:linClrLst>
+    <dgm:effectClrLst/>
+    <dgm:txLinClrLst/>
+    <dgm:txFillClrLst meth="repeat">
+      <a:schemeClr val="lt1"/>
+    </dgm:txFillClrLst>
+    <dgm:txEffectClrLst/>
+  </dgm:styleLbl>
+  <dgm:styleLbl name="parChTrans2D3">
+    <dgm:fillClrLst meth="repeat">
+      <a:schemeClr val="accent1"/>
+    </dgm:fillClrLst>
+    <dgm:linClrLst meth="repeat">
+      <a:schemeClr val="accent1"/>
+    </dgm:linClrLst>
+    <dgm:effectClrLst/>
+    <dgm:txLinClrLst/>
+    <dgm:txFillClrLst meth="repeat">
+      <a:schemeClr val="lt1"/>
+    </dgm:txFillClrLst>
+    <dgm:txEffectClrLst/>
+  </dgm:styleLbl>
+  <dgm:styleLbl name="parChTrans2D4">
+    <dgm:fillClrLst meth="repeat">
+      <a:schemeClr val="accent1"/>
+    </dgm:fillClrLst>
+    <dgm:linClrLst meth="repeat">
+      <a:schemeClr val="accent1"/>
+    </dgm:linClrLst>
+    <dgm:effectClrLst/>
+    <dgm:txLinClrLst/>
+    <dgm:txFillClrLst meth="repeat">
+      <a:schemeClr val="lt1"/>
+    </dgm:txFillClrLst>
+    <dgm:txEffectClrLst/>
+  </dgm:styleLbl>
+  <dgm:styleLbl name="parChTrans1D1">
+    <dgm:fillClrLst meth="repeat">
+      <a:schemeClr val="accent1"/>
+    </dgm:fillClrLst>
+    <dgm:linClrLst meth="repeat">
+      <a:schemeClr val="accent1">
+        <a:shade val="60000"/>
+      </a:schemeClr>
+    </dgm:linClrLst>
+    <dgm:effectClrLst/>
+    <dgm:txLinClrLst/>
+    <dgm:txFillClrLst meth="repeat">
+      <a:schemeClr val="tx1"/>
+    </dgm:txFillClrLst>
+    <dgm:txEffectClrLst/>
+  </dgm:styleLbl>
+  <dgm:styleLbl name="parChTrans1D2">
+    <dgm:fillClrLst meth="repeat">
+      <a:schemeClr val="accent1"/>
+    </dgm:fillClrLst>
+    <dgm:linClrLst meth="repeat">
+      <a:schemeClr val="accent1">
+        <a:shade val="60000"/>
+      </a:schemeClr>
+    </dgm:linClrLst>
+    <dgm:effectClrLst/>
+    <dgm:txLinClrLst/>
+    <dgm:txFillClrLst meth="repeat">
+      <a:schemeClr val="tx1"/>
+    </dgm:txFillClrLst>
+    <dgm:txEffectClrLst/>
+  </dgm:styleLbl>
+  <dgm:styleLbl name="parChTrans1D3">
+    <dgm:fillClrLst meth="repeat">
+      <a:schemeClr val="accent1"/>
+    </dgm:fillClrLst>
+    <dgm:linClrLst meth="repeat">
+      <a:schemeClr val="accent1">
+        <a:shade val="80000"/>
+      </a:schemeClr>
+    </dgm:linClrLst>
+    <dgm:effectClrLst/>
+    <dgm:txLinClrLst/>
+    <dgm:txFillClrLst meth="repeat">
+      <a:schemeClr val="tx1"/>
+    </dgm:txFillClrLst>
+    <dgm:txEffectClrLst/>
+  </dgm:styleLbl>
+  <dgm:styleLbl name="parChTrans1D4">
+    <dgm:fillClrLst meth="repeat">
+      <a:schemeClr val="accent1"/>
+    </dgm:fillClrLst>
+    <dgm:linClrLst meth="repeat">
+      <a:schemeClr val="accent1">
+        <a:shade val="80000"/>
+      </a:schemeClr>
+    </dgm:linClrLst>
+    <dgm:effectClrLst/>
+    <dgm:txLinClrLst/>
+    <dgm:txFillClrLst meth="repeat">
+      <a:schemeClr val="tx1"/>
+    </dgm:txFillClrLst>
+    <dgm:txEffectClrLst/>
+  </dgm:styleLbl>
+  <dgm:styleLbl name="fgAcc1">
+    <dgm:fillClrLst meth="repeat">
+      <a:schemeClr val="lt1">
+        <a:alpha val="90000"/>
+      </a:schemeClr>
+    </dgm:fillClrLst>
+    <dgm:linClrLst meth="repeat">
+      <a:schemeClr val="accent1"/>
+    </dgm:linClrLst>
+    <dgm:effectClrLst/>
+    <dgm:txLinClrLst/>
+    <dgm:txFillClrLst meth="repeat">
+      <a:schemeClr val="dk1"/>
+    </dgm:txFillClrLst>
+    <dgm:txEffectClrLst/>
+  </dgm:styleLbl>
+  <dgm:styleLbl name="conFgAcc1">
+    <dgm:fillClrLst meth="repeat">
+      <a:schemeClr val="lt1">
+        <a:alpha val="90000"/>
+      </a:schemeClr>
+    </dgm:fillClrLst>
+    <dgm:linClrLst meth="repeat">
+      <a:schemeClr val="accent1"/>
+    </dgm:linClrLst>
+    <dgm:effectClrLst/>
+    <dgm:txLinClrLst/>
+    <dgm:txFillClrLst meth="repeat">
+      <a:schemeClr val="dk1"/>
+    </dgm:txFillClrLst>
+    <dgm:txEffectClrLst/>
+  </dgm:styleLbl>
+  <dgm:styleLbl name="alignAcc1">
+    <dgm:fillClrLst meth="repeat">
+      <a:schemeClr val="lt1">
+        <a:alpha val="90000"/>
+      </a:schemeClr>
+    </dgm:fillClrLst>
+    <dgm:linClrLst meth="repeat">
+      <a:schemeClr val="accent1"/>
+    </dgm:linClrLst>
+    <dgm:effectClrLst/>
+    <dgm:txLinClrLst/>
+    <dgm:txFillClrLst meth="repeat">
+      <a:schemeClr val="dk1"/>
+    </dgm:txFillClrLst>
+    <dgm:txEffectClrLst/>
+  </dgm:styleLbl>
+  <dgm:styleLbl name="trAlignAcc1">
+    <dgm:fillClrLst meth="repeat">
+      <a:schemeClr val="lt1">
+        <a:alpha val="40000"/>
+      </a:schemeClr>
+    </dgm:fillClrLst>
+    <dgm:linClrLst meth="repeat">
+      <a:schemeClr val="accent1"/>
+    </dgm:linClrLst>
+    <dgm:effectClrLst/>
+    <dgm:txLinClrLst/>
+    <dgm:txFillClrLst meth="repeat">
+      <a:schemeClr val="dk1"/>
+    </dgm:txFillClrLst>
+    <dgm:txEffectClrLst/>
+  </dgm:styleLbl>
+  <dgm:styleLbl name="bgAcc1">
+    <dgm:fillClrLst meth="repeat">
+      <a:schemeClr val="lt1">
+        <a:alpha val="90000"/>
+      </a:schemeClr>
+    </dgm:fillClrLst>
+    <dgm:linClrLst meth="repeat">
+      <a:schemeClr val="accent1"/>
+    </dgm:linClrLst>
+    <dgm:effectClrLst/>
+    <dgm:txLinClrLst/>
+    <dgm:txFillClrLst meth="repeat">
+      <a:schemeClr val="dk1"/>
+    </dgm:txFillClrLst>
+    <dgm:txEffectClrLst/>
+  </dgm:styleLbl>
+  <dgm:styleLbl name="solidFgAcc1">
+    <dgm:fillClrLst meth="repeat">
+      <a:schemeClr val="lt1"/>
+    </dgm:fillClrLst>
+    <dgm:linClrLst meth="repeat">
+      <a:schemeClr val="accent1"/>
+    </dgm:linClrLst>
+    <dgm:effectClrLst/>
+    <dgm:txLinClrLst/>
+    <dgm:txFillClrLst meth="repeat">
+      <a:schemeClr val="dk1"/>
+    </dgm:txFillClrLst>
+    <dgm:txEffectClrLst/>
+  </dgm:styleLbl>
+  <dgm:styleLbl name="solidAlignAcc1">
+    <dgm:fillClrLst meth="repeat">
+      <a:schemeClr val="lt1"/>
+    </dgm:fillClrLst>
+    <dgm:linClrLst meth="repeat">
+      <a:schemeClr val="accent1"/>
+    </dgm:linClrLst>
+    <dgm:effectClrLst/>
+    <dgm:txLinClrLst/>
+    <dgm:txFillClrLst meth="repeat">
+      <a:schemeClr val="dk1"/>
+    </dgm:txFillClrLst>
+    <dgm:txEffectClrLst/>
+  </dgm:styleLbl>
+  <dgm:styleLbl name="solidBgAcc1">
+    <dgm:fillClrLst meth="repeat">
+      <a:schemeClr val="lt1"/>
+    </dgm:fillClrLst>
+    <dgm:linClrLst meth="repeat">
+      <a:schemeClr val="accent1"/>
+    </dgm:linClrLst>
+    <dgm:effectClrLst/>
+    <dgm:txLinClrLst/>
+    <dgm:txFillClrLst meth="repeat">
+      <a:schemeClr val="dk1"/>
+    </dgm:txFillClrLst>
+    <dgm:txEffectClrLst/>
+  </dgm:styleLbl>
+  <dgm:styleLbl name="fgAccFollowNode1">
+    <dgm:fillClrLst meth="repeat">
+      <a:schemeClr val="accent1">
+        <a:alpha val="90000"/>
+        <a:tint val="40000"/>
+      </a:schemeClr>
+    </dgm:fillClrLst>
+    <dgm:linClrLst meth="repeat">
+      <a:schemeClr val="accent1">
+        <a:alpha val="90000"/>
+        <a:tint val="40000"/>
+      </a:schemeClr>
+    </dgm:linClrLst>
+    <dgm:effectClrLst/>
+    <dgm:txLinClrLst/>
+    <dgm:txFillClrLst meth="repeat">
+      <a:schemeClr val="dk1"/>
+    </dgm:txFillClrLst>
+    <dgm:txEffectClrLst/>
+  </dgm:styleLbl>
+  <dgm:styleLbl name="alignAccFollowNode1">
+    <dgm:fillClrLst meth="repeat">
+      <a:schemeClr val="accent1">
+        <a:alpha val="90000"/>
+        <a:tint val="40000"/>
+      </a:schemeClr>
+    </dgm:fillClrLst>
+    <dgm:linClrLst meth="repeat">
+      <a:schemeClr val="accent1">
+        <a:alpha val="90000"/>
+        <a:tint val="40000"/>
+      </a:schemeClr>
+    </dgm:linClrLst>
+    <dgm:effectClrLst/>
+    <dgm:txLinClrLst/>
+    <dgm:txFillClrLst meth="repeat">
+      <a:schemeClr val="dk1"/>
+    </dgm:txFillClrLst>
+    <dgm:txEffectClrLst/>
+  </dgm:styleLbl>
+  <dgm:styleLbl name="bgAccFollowNode1">
+    <dgm:fillClrLst meth="repeat">
+      <a:schemeClr val="accent1">
+        <a:alpha val="90000"/>
+        <a:tint val="40000"/>
+      </a:schemeClr>
+    </dgm:fillClrLst>
+    <dgm:linClrLst meth="repeat">
+      <a:schemeClr val="accent1">
+        <a:alpha val="90000"/>
+        <a:tint val="40000"/>
+      </a:schemeClr>
+    </dgm:linClrLst>
+    <dgm:effectClrLst/>
+    <dgm:txLinClrLst/>
+    <dgm:txFillClrLst meth="repeat">
+      <a:schemeClr val="dk1"/>
+    </dgm:txFillClrLst>
+    <dgm:txEffectClrLst/>
+  </dgm:styleLbl>
+  <dgm:styleLbl name="fgAcc0">
+    <dgm:fillClrLst meth="repeat">
+      <a:schemeClr val="lt1">
+        <a:alpha val="90000"/>
+      </a:schemeClr>
+    </dgm:fillClrLst>
+    <dgm:linClrLst meth="repeat">
+      <a:schemeClr val="accent1"/>
+    </dgm:linClrLst>
+    <dgm:effectClrLst/>
+    <dgm:txLinClrLst/>
+    <dgm:txFillClrLst meth="repeat">
+      <a:schemeClr val="dk1"/>
+    </dgm:txFillClrLst>
+    <dgm:txEffectClrLst/>
+  </dgm:styleLbl>
+  <dgm:styleLbl name="fgAcc2">
+    <dgm:fillClrLst meth="repeat">
+      <a:schemeClr val="lt1">
+        <a:alpha val="90000"/>
+      </a:schemeClr>
+    </dgm:fillClrLst>
+    <dgm:linClrLst meth="repeat">
+      <a:schemeClr val="accent1"/>
+    </dgm:linClrLst>
+    <dgm:effectClrLst/>
+    <dgm:txLinClrLst/>
+    <dgm:txFillClrLst meth="repeat">
+      <a:schemeClr val="dk1"/>
+    </dgm:txFillClrLst>
+    <dgm:txEffectClrLst/>
+  </dgm:styleLbl>
+  <dgm:styleLbl name="fgAcc3">
+    <dgm:fillClrLst meth="repeat">
+      <a:schemeClr val="lt1">
+        <a:alpha val="90000"/>
+      </a:schemeClr>
+    </dgm:fillClrLst>
+    <dgm:linClrLst meth="repeat">
+      <a:schemeClr val="accent1"/>
+    </dgm:linClrLst>
+    <dgm:effectClrLst/>
+    <dgm:txLinClrLst/>
+    <dgm:txFillClrLst meth="repeat">
+      <a:schemeClr val="dk1"/>
+    </dgm:txFillClrLst>
+    <dgm:txEffectClrLst/>
+  </dgm:styleLbl>
+  <dgm:styleLbl name="fgAcc4">
+    <dgm:fillClrLst meth="repeat">
+      <a:schemeClr val="lt1">
+        <a:alpha val="90000"/>
+      </a:schemeClr>
+    </dgm:fillClrLst>
+    <dgm:linClrLst meth="repeat">
+      <a:schemeClr val="accent1"/>
+    </dgm:linClrLst>
+    <dgm:effectClrLst/>
+    <dgm:txLinClrLst/>
+    <dgm:txFillClrLst meth="repeat">
+      <a:schemeClr val="dk1"/>
+    </dgm:txFillClrLst>
+    <dgm:txEffectClrLst/>
+  </dgm:styleLbl>
+  <dgm:styleLbl name="bgShp">
+    <dgm:fillClrLst meth="repeat">
+      <a:schemeClr val="accent1">
+        <a:tint val="40000"/>
+      </a:schemeClr>
+    </dgm:fillClrLst>
+    <dgm:linClrLst meth="repeat">
+      <a:schemeClr val="accent1"/>
+    </dgm:linClrLst>
+    <dgm:effectClrLst/>
+    <dgm:txLinClrLst/>
+    <dgm:txFillClrLst meth="repeat">
+      <a:schemeClr val="dk1"/>
+    </dgm:txFillClrLst>
+    <dgm:txEffectClrLst/>
+  </dgm:styleLbl>
+  <dgm:styleLbl name="dkBgShp">
+    <dgm:fillClrLst meth="repeat">
+      <a:schemeClr val="accent1">
+        <a:shade val="80000"/>
+      </a:schemeClr>
+    </dgm:fillClrLst>
+    <dgm:linClrLst meth="repeat">
+      <a:schemeClr val="accent1"/>
+    </dgm:linClrLst>
+    <dgm:effectClrLst/>
+    <dgm:txLinClrLst/>
+    <dgm:txFillClrLst meth="repeat">
+      <a:schemeClr val="lt1"/>
+    </dgm:txFillClrLst>
+    <dgm:txEffectClrLst/>
+  </dgm:styleLbl>
+  <dgm:styleLbl name="trBgShp">
+    <dgm:fillClrLst meth="repeat">
+      <a:schemeClr val="accent1">
+        <a:tint val="50000"/>
+        <a:alpha val="40000"/>
+      </a:schemeClr>
+    </dgm:fillClrLst>
+    <dgm:linClrLst meth="repeat">
+      <a:schemeClr val="accent1"/>
+    </dgm:linClrLst>
+    <dgm:effectClrLst/>
+    <dgm:txLinClrLst/>
+    <dgm:txFillClrLst meth="repeat">
+      <a:schemeClr val="lt1"/>
+    </dgm:txFillClrLst>
+    <dgm:txEffectClrLst/>
+  </dgm:styleLbl>
+  <dgm:styleLbl name="fgShp">
+    <dgm:fillClrLst meth="repeat">
+      <a:schemeClr val="accent1">
+        <a:tint val="60000"/>
+      </a:schemeClr>
+    </dgm:fillClrLst>
+    <dgm:linClrLst meth="repeat">
+      <a:schemeClr val="lt1"/>
+    </dgm:linClrLst>
+    <dgm:effectClrLst/>
+    <dgm:txLinClrLst/>
+    <dgm:txFillClrLst meth="repeat">
+      <a:schemeClr val="dk1"/>
+    </dgm:txFillClrLst>
+    <dgm:txEffectClrLst/>
+  </dgm:styleLbl>
+  <dgm:styleLbl name="revTx">
+    <dgm:fillClrLst meth="repeat">
+      <a:schemeClr val="lt1">
+        <a:alpha val="0"/>
+      </a:schemeClr>
+    </dgm:fillClrLst>
+    <dgm:linClrLst meth="repeat">
+      <a:schemeClr val="dk1">
+        <a:alpha val="0"/>
+      </a:schemeClr>
+    </dgm:linClrLst>
+    <dgm:effectClrLst/>
+    <dgm:txLinClrLst/>
+    <dgm:txFillClrLst meth="repeat">
+      <a:schemeClr val="tx1"/>
+    </dgm:txFillClrLst>
+    <dgm:txEffectClrLst/>
+  </dgm:styleLbl>
+</dgm:colorsDef>
+</file>
+
 <file path=ppt/diagrams/data1.xml><?xml version="1.0" encoding="utf-8"?>
+<dgm:dataModel xmlns:dgm="http://schemas.openxmlformats.org/drawingml/2006/diagram" xmlns:a="http://schemas.openxmlformats.org/drawingml/2006/main">
+  <dgm:ptLst>
+    <dgm:pt modelId="{C71A931B-CE55-419D-BEC3-0BA06FBE20F4}" type="doc">
+      <dgm:prSet loTypeId="urn:microsoft.com/office/officeart/2005/8/layout/vList2" loCatId="list" qsTypeId="urn:microsoft.com/office/officeart/2005/8/quickstyle/simple1" qsCatId="simple" csTypeId="urn:microsoft.com/office/officeart/2005/8/colors/accent1_2" csCatId="accent1" phldr="1"/>
+      <dgm:spPr/>
+      <dgm:t>
+        <a:bodyPr/>
+        <a:lstStyle/>
+        <a:p>
+          <a:endParaRPr lang="en-US"/>
+        </a:p>
+      </dgm:t>
+    </dgm:pt>
+    <dgm:pt modelId="{C7E98650-DCD6-4A4F-99B0-28E4238F7498}">
+      <dgm:prSet phldrT="[Text]" custT="1"/>
+      <dgm:spPr>
+        <a:noFill/>
+      </dgm:spPr>
+      <dgm:t>
+        <a:bodyPr/>
+        <a:lstStyle/>
+        <a:p>
+          <a:pPr>
+            <a:buNone/>
+          </a:pPr>
+          <a:r>
+            <a:rPr lang="en-US" sz="2000" b="1" dirty="0">
+              <a:latin typeface="Calibri" panose="020F0502020204030204" pitchFamily="34" charset="0"/>
+              <a:ea typeface="Calibri" panose="020F0502020204030204" pitchFamily="34" charset="0"/>
+              <a:cs typeface="Calibri" panose="020F0502020204030204" pitchFamily="34" charset="0"/>
+            </a:rPr>
+            <a:t>Model Choice - </a:t>
+          </a:r>
+          <a:r>
+            <a:rPr lang="es-ES" sz="2000" dirty="0">
+              <a:latin typeface="Calibri" panose="020F0502020204030204" pitchFamily="34" charset="0"/>
+              <a:ea typeface="Calibri" panose="020F0502020204030204" pitchFamily="34" charset="0"/>
+              <a:cs typeface="Calibri" panose="020F0502020204030204" pitchFamily="34" charset="0"/>
+            </a:rPr>
+            <a:t>Used local LLaMA via Ollama</a:t>
+          </a:r>
+          <a:endParaRPr lang="en-US" sz="2000" b="1" dirty="0">
+            <a:latin typeface="Calibri" panose="020F0502020204030204" pitchFamily="34" charset="0"/>
+            <a:ea typeface="Calibri" panose="020F0502020204030204" pitchFamily="34" charset="0"/>
+            <a:cs typeface="Calibri" panose="020F0502020204030204" pitchFamily="34" charset="0"/>
+          </a:endParaRPr>
+        </a:p>
+      </dgm:t>
+    </dgm:pt>
+    <dgm:pt modelId="{9B86215B-9B1D-4A2A-BD08-93BADA2D4FF8}" type="parTrans" cxnId="{5F806B13-1236-4B2C-B936-E2ED865EB82C}">
+      <dgm:prSet/>
+      <dgm:spPr/>
+      <dgm:t>
+        <a:bodyPr/>
+        <a:lstStyle/>
+        <a:p>
+          <a:endParaRPr lang="en-US"/>
+        </a:p>
+      </dgm:t>
+    </dgm:pt>
+    <dgm:pt modelId="{B7C5BAC5-1C92-4590-ABEB-F8CE18DB5C67}" type="sibTrans" cxnId="{5F806B13-1236-4B2C-B936-E2ED865EB82C}">
+      <dgm:prSet/>
+      <dgm:spPr/>
+      <dgm:t>
+        <a:bodyPr/>
+        <a:lstStyle/>
+        <a:p>
+          <a:endParaRPr lang="en-US"/>
+        </a:p>
+      </dgm:t>
+    </dgm:pt>
+    <dgm:pt modelId="{9354A0FF-B808-4F07-ADBF-56180FF13F2B}">
+      <dgm:prSet phldrT="[Text]" custT="1"/>
+      <dgm:spPr>
+        <a:noFill/>
+      </dgm:spPr>
+      <dgm:t>
+        <a:bodyPr/>
+        <a:lstStyle/>
+        <a:p>
+          <a:pPr>
+            <a:buNone/>
+          </a:pPr>
+          <a:r>
+            <a:rPr lang="en-US" sz="2000" b="1" dirty="0">
+              <a:latin typeface="Calibri" panose="020F0502020204030204" pitchFamily="34" charset="0"/>
+              <a:ea typeface="Calibri" panose="020F0502020204030204" pitchFamily="34" charset="0"/>
+              <a:cs typeface="Calibri" panose="020F0502020204030204" pitchFamily="34" charset="0"/>
+            </a:rPr>
+            <a:t>Embedding Model - </a:t>
+          </a:r>
+          <a:r>
+            <a:rPr lang="en-US" sz="2000" dirty="0">
+              <a:latin typeface="Calibri" panose="020F0502020204030204" pitchFamily="34" charset="0"/>
+              <a:ea typeface="Calibri" panose="020F0502020204030204" pitchFamily="34" charset="0"/>
+              <a:cs typeface="Calibri" panose="020F0502020204030204" pitchFamily="34" charset="0"/>
+            </a:rPr>
+            <a:t>sentence-transformers</a:t>
+          </a:r>
+          <a:endParaRPr lang="en-US" sz="2000" b="1" dirty="0">
+            <a:latin typeface="Calibri" panose="020F0502020204030204" pitchFamily="34" charset="0"/>
+            <a:ea typeface="Calibri" panose="020F0502020204030204" pitchFamily="34" charset="0"/>
+            <a:cs typeface="Calibri" panose="020F0502020204030204" pitchFamily="34" charset="0"/>
+          </a:endParaRPr>
+        </a:p>
+      </dgm:t>
+    </dgm:pt>
+    <dgm:pt modelId="{6B514570-4B59-4C6D-9ED0-4E85AD748AD5}" type="parTrans" cxnId="{75A37EA3-4FF4-4FAA-B681-126760017C4B}">
+      <dgm:prSet/>
+      <dgm:spPr/>
+      <dgm:t>
+        <a:bodyPr/>
+        <a:lstStyle/>
+        <a:p>
+          <a:endParaRPr lang="en-US"/>
+        </a:p>
+      </dgm:t>
+    </dgm:pt>
+    <dgm:pt modelId="{5A5389A3-B94E-45FE-A5C4-F2DC4F5E9FD2}" type="sibTrans" cxnId="{75A37EA3-4FF4-4FAA-B681-126760017C4B}">
+      <dgm:prSet/>
+      <dgm:spPr/>
+      <dgm:t>
+        <a:bodyPr/>
+        <a:lstStyle/>
+        <a:p>
+          <a:endParaRPr lang="en-US"/>
+        </a:p>
+      </dgm:t>
+    </dgm:pt>
+    <dgm:pt modelId="{221EFABD-9B0F-4301-B586-624A5905EE3E}">
+      <dgm:prSet custT="1"/>
+      <dgm:spPr/>
+      <dgm:t>
+        <a:bodyPr/>
+        <a:lstStyle/>
+        <a:p>
+          <a:pPr>
+            <a:buNone/>
+          </a:pPr>
+          <a:r>
+            <a:rPr lang="en-US" sz="1800" dirty="0">
+              <a:latin typeface="Calibri" panose="020F0502020204030204" pitchFamily="34" charset="0"/>
+              <a:ea typeface="Calibri" panose="020F0502020204030204" pitchFamily="34" charset="0"/>
+              <a:cs typeface="Calibri" panose="020F0502020204030204" pitchFamily="34" charset="0"/>
+            </a:rPr>
+            <a:t>Reason: cost control + private deployment simulation</a:t>
+          </a:r>
+          <a:endParaRPr lang="en-US" sz="1900" dirty="0">
+            <a:latin typeface="Calibri" panose="020F0502020204030204" pitchFamily="34" charset="0"/>
+            <a:ea typeface="Calibri" panose="020F0502020204030204" pitchFamily="34" charset="0"/>
+            <a:cs typeface="Calibri" panose="020F0502020204030204" pitchFamily="34" charset="0"/>
+          </a:endParaRPr>
+        </a:p>
+      </dgm:t>
+    </dgm:pt>
+    <dgm:pt modelId="{20E22F03-50CB-4780-9009-2EB50FDB8E2D}" type="parTrans" cxnId="{BE63C760-405A-41C9-8AC7-991C08F2B096}">
+      <dgm:prSet/>
+      <dgm:spPr/>
+      <dgm:t>
+        <a:bodyPr/>
+        <a:lstStyle/>
+        <a:p>
+          <a:endParaRPr lang="en-US"/>
+        </a:p>
+      </dgm:t>
+    </dgm:pt>
+    <dgm:pt modelId="{0375F0C1-BFCA-49F5-B819-97FB65DDC92F}" type="sibTrans" cxnId="{BE63C760-405A-41C9-8AC7-991C08F2B096}">
+      <dgm:prSet/>
+      <dgm:spPr/>
+      <dgm:t>
+        <a:bodyPr/>
+        <a:lstStyle/>
+        <a:p>
+          <a:endParaRPr lang="en-US"/>
+        </a:p>
+      </dgm:t>
+    </dgm:pt>
+    <dgm:pt modelId="{3767A6D3-27E9-4597-B744-09CE719848F2}">
+      <dgm:prSet custT="1"/>
+      <dgm:spPr/>
+      <dgm:t>
+        <a:bodyPr/>
+        <a:lstStyle/>
+        <a:p>
+          <a:pPr>
+            <a:buNone/>
+          </a:pPr>
+          <a:r>
+            <a:rPr lang="en-US" sz="1800" dirty="0">
+              <a:latin typeface="Calibri" panose="020F0502020204030204" pitchFamily="34" charset="0"/>
+              <a:ea typeface="Calibri" panose="020F0502020204030204" pitchFamily="34" charset="0"/>
+              <a:cs typeface="Calibri" panose="020F0502020204030204" pitchFamily="34" charset="0"/>
+            </a:rPr>
+            <a:t>Tradeoff: smaller model vs embedding richness(lightweight, CPU-friendly)</a:t>
+          </a:r>
+        </a:p>
+      </dgm:t>
+    </dgm:pt>
+    <dgm:pt modelId="{E85C5CBC-EDB1-45C3-823D-A9F1AAE3E49D}" type="parTrans" cxnId="{4D9F2563-8823-41AD-AD86-CBA41C11BAB8}">
+      <dgm:prSet/>
+      <dgm:spPr/>
+      <dgm:t>
+        <a:bodyPr/>
+        <a:lstStyle/>
+        <a:p>
+          <a:endParaRPr lang="en-US"/>
+        </a:p>
+      </dgm:t>
+    </dgm:pt>
+    <dgm:pt modelId="{4C8BA78D-909C-4EBF-88B9-5834ACE7E8E3}" type="sibTrans" cxnId="{4D9F2563-8823-41AD-AD86-CBA41C11BAB8}">
+      <dgm:prSet/>
+      <dgm:spPr/>
+      <dgm:t>
+        <a:bodyPr/>
+        <a:lstStyle/>
+        <a:p>
+          <a:endParaRPr lang="en-US"/>
+        </a:p>
+      </dgm:t>
+    </dgm:pt>
+    <dgm:pt modelId="{46D3DE61-8590-4E6D-A308-DBEF8D7F68E3}">
+      <dgm:prSet custT="1"/>
+      <dgm:spPr>
+        <a:noFill/>
+      </dgm:spPr>
+      <dgm:t>
+        <a:bodyPr/>
+        <a:lstStyle/>
+        <a:p>
+          <a:pPr>
+            <a:buNone/>
+          </a:pPr>
+          <a:r>
+            <a:rPr lang="en-US" sz="2000" b="1" dirty="0">
+              <a:latin typeface="Calibri" panose="020F0502020204030204" pitchFamily="34" charset="0"/>
+              <a:ea typeface="Calibri" panose="020F0502020204030204" pitchFamily="34" charset="0"/>
+              <a:cs typeface="Calibri" panose="020F0502020204030204" pitchFamily="34" charset="0"/>
+            </a:rPr>
+            <a:t>Vector Store - </a:t>
+          </a:r>
+          <a:r>
+            <a:rPr lang="en-US" sz="2000" dirty="0">
+              <a:latin typeface="Calibri" panose="020F0502020204030204" pitchFamily="34" charset="0"/>
+              <a:ea typeface="Calibri" panose="020F0502020204030204" pitchFamily="34" charset="0"/>
+              <a:cs typeface="Calibri" panose="020F0502020204030204" pitchFamily="34" charset="0"/>
+            </a:rPr>
+            <a:t>Chroma</a:t>
+          </a:r>
+          <a:endParaRPr lang="en-US" sz="2000" b="1" dirty="0">
+            <a:latin typeface="Calibri" panose="020F0502020204030204" pitchFamily="34" charset="0"/>
+            <a:ea typeface="Calibri" panose="020F0502020204030204" pitchFamily="34" charset="0"/>
+            <a:cs typeface="Calibri" panose="020F0502020204030204" pitchFamily="34" charset="0"/>
+          </a:endParaRPr>
+        </a:p>
+      </dgm:t>
+    </dgm:pt>
+    <dgm:pt modelId="{AB3F3B8D-88E1-432C-A6B3-97AA9C2BF304}" type="parTrans" cxnId="{670FADEE-C1D6-468B-B878-B81CBD5DBD1D}">
+      <dgm:prSet/>
+      <dgm:spPr/>
+      <dgm:t>
+        <a:bodyPr/>
+        <a:lstStyle/>
+        <a:p>
+          <a:endParaRPr lang="en-US"/>
+        </a:p>
+      </dgm:t>
+    </dgm:pt>
+    <dgm:pt modelId="{54110DCC-DB50-494B-AF89-3D50BC429A8A}" type="sibTrans" cxnId="{670FADEE-C1D6-468B-B878-B81CBD5DBD1D}">
+      <dgm:prSet/>
+      <dgm:spPr/>
+      <dgm:t>
+        <a:bodyPr/>
+        <a:lstStyle/>
+        <a:p>
+          <a:endParaRPr lang="en-US"/>
+        </a:p>
+      </dgm:t>
+    </dgm:pt>
+    <dgm:pt modelId="{D20DD158-91D3-45A9-8393-29B9920CC9AB}">
+      <dgm:prSet custT="1"/>
+      <dgm:spPr/>
+      <dgm:t>
+        <a:bodyPr/>
+        <a:lstStyle/>
+        <a:p>
+          <a:pPr>
+            <a:buNone/>
+          </a:pPr>
+          <a:r>
+            <a:rPr lang="en-US" sz="1800" dirty="0">
+              <a:latin typeface="Calibri" panose="020F0502020204030204" pitchFamily="34" charset="0"/>
+              <a:ea typeface="Calibri" panose="020F0502020204030204" pitchFamily="34" charset="0"/>
+              <a:cs typeface="Calibri" panose="020F0502020204030204" pitchFamily="34" charset="0"/>
+            </a:rPr>
+            <a:t>Reason: simple setup, fast local indexing</a:t>
+          </a:r>
+          <a:endParaRPr lang="en-US" sz="1900" dirty="0">
+            <a:latin typeface="Calibri" panose="020F0502020204030204" pitchFamily="34" charset="0"/>
+            <a:ea typeface="Calibri" panose="020F0502020204030204" pitchFamily="34" charset="0"/>
+            <a:cs typeface="Calibri" panose="020F0502020204030204" pitchFamily="34" charset="0"/>
+          </a:endParaRPr>
+        </a:p>
+      </dgm:t>
+    </dgm:pt>
+    <dgm:pt modelId="{181621CA-9F2E-4636-9440-7D5FF03EE1AB}" type="parTrans" cxnId="{3FCE132C-4961-4ACE-A1FE-AC1712B35620}">
+      <dgm:prSet/>
+      <dgm:spPr/>
+      <dgm:t>
+        <a:bodyPr/>
+        <a:lstStyle/>
+        <a:p>
+          <a:endParaRPr lang="en-US"/>
+        </a:p>
+      </dgm:t>
+    </dgm:pt>
+    <dgm:pt modelId="{61682AC1-34B4-4F4C-A828-663B1C036B25}" type="sibTrans" cxnId="{3FCE132C-4961-4ACE-A1FE-AC1712B35620}">
+      <dgm:prSet/>
+      <dgm:spPr/>
+      <dgm:t>
+        <a:bodyPr/>
+        <a:lstStyle/>
+        <a:p>
+          <a:endParaRPr lang="en-US"/>
+        </a:p>
+      </dgm:t>
+    </dgm:pt>
+    <dgm:pt modelId="{BBE45022-DD26-46B6-AF22-52D705AF7081}">
+      <dgm:prSet custT="1"/>
+      <dgm:spPr>
+        <a:noFill/>
+      </dgm:spPr>
+      <dgm:t>
+        <a:bodyPr/>
+        <a:lstStyle/>
+        <a:p>
+          <a:pPr>
+            <a:buNone/>
+          </a:pPr>
+          <a:r>
+            <a:rPr lang="en-US" sz="2000" b="1" dirty="0">
+              <a:latin typeface="Calibri" panose="020F0502020204030204" pitchFamily="34" charset="0"/>
+              <a:ea typeface="Calibri" panose="020F0502020204030204" pitchFamily="34" charset="0"/>
+              <a:cs typeface="Calibri" panose="020F0502020204030204" pitchFamily="34" charset="0"/>
+            </a:rPr>
+            <a:t>Retrieval Strategy - </a:t>
+          </a:r>
+          <a:r>
+            <a:rPr lang="en-US" sz="2000" dirty="0">
+              <a:latin typeface="Calibri" panose="020F0502020204030204" pitchFamily="34" charset="0"/>
+              <a:ea typeface="Calibri" panose="020F0502020204030204" pitchFamily="34" charset="0"/>
+              <a:cs typeface="Calibri" panose="020F0502020204030204" pitchFamily="34" charset="0"/>
+            </a:rPr>
+            <a:t>Top-K + similarity threshold</a:t>
+          </a:r>
+          <a:endParaRPr lang="en-US" sz="2000" b="1" dirty="0">
+            <a:latin typeface="Calibri" panose="020F0502020204030204" pitchFamily="34" charset="0"/>
+            <a:ea typeface="Calibri" panose="020F0502020204030204" pitchFamily="34" charset="0"/>
+            <a:cs typeface="Calibri" panose="020F0502020204030204" pitchFamily="34" charset="0"/>
+          </a:endParaRPr>
+        </a:p>
+      </dgm:t>
+    </dgm:pt>
+    <dgm:pt modelId="{F9A60702-DD57-4DE3-8B21-9B9D357F9C68}" type="parTrans" cxnId="{8D7560E2-A953-4BDA-9E53-37A74EAF6A12}">
+      <dgm:prSet/>
+      <dgm:spPr/>
+      <dgm:t>
+        <a:bodyPr/>
+        <a:lstStyle/>
+        <a:p>
+          <a:endParaRPr lang="en-US"/>
+        </a:p>
+      </dgm:t>
+    </dgm:pt>
+    <dgm:pt modelId="{C2C6B726-963F-446C-97D0-5C4CDFC186A5}" type="sibTrans" cxnId="{8D7560E2-A953-4BDA-9E53-37A74EAF6A12}">
+      <dgm:prSet/>
+      <dgm:spPr/>
+      <dgm:t>
+        <a:bodyPr/>
+        <a:lstStyle/>
+        <a:p>
+          <a:endParaRPr lang="en-US"/>
+        </a:p>
+      </dgm:t>
+    </dgm:pt>
+    <dgm:pt modelId="{8576DB89-BAD8-4662-9215-F9A76D63D815}">
+      <dgm:prSet custT="1"/>
+      <dgm:spPr/>
+      <dgm:t>
+        <a:bodyPr/>
+        <a:lstStyle/>
+        <a:p>
+          <a:pPr>
+            <a:buNone/>
+          </a:pPr>
+          <a:r>
+            <a:rPr lang="en-US" sz="1800" dirty="0">
+              <a:latin typeface="Calibri" panose="020F0502020204030204" pitchFamily="34" charset="0"/>
+              <a:ea typeface="Calibri" panose="020F0502020204030204" pitchFamily="34" charset="0"/>
+              <a:cs typeface="Calibri" panose="020F0502020204030204" pitchFamily="34" charset="0"/>
+            </a:rPr>
+            <a:t>Tradeoff: precision vs recall</a:t>
+          </a:r>
+        </a:p>
+      </dgm:t>
+    </dgm:pt>
+    <dgm:pt modelId="{D9AD628D-DF33-4E10-8125-37E01DCFD022}" type="parTrans" cxnId="{71B7FCA8-DF88-4BB9-BFCD-B1F2B45E0155}">
+      <dgm:prSet/>
+      <dgm:spPr/>
+      <dgm:t>
+        <a:bodyPr/>
+        <a:lstStyle/>
+        <a:p>
+          <a:endParaRPr lang="en-US"/>
+        </a:p>
+      </dgm:t>
+    </dgm:pt>
+    <dgm:pt modelId="{9E3BE0B4-7028-4C55-81FB-D9D02D12F07C}" type="sibTrans" cxnId="{71B7FCA8-DF88-4BB9-BFCD-B1F2B45E0155}">
+      <dgm:prSet/>
+      <dgm:spPr/>
+      <dgm:t>
+        <a:bodyPr/>
+        <a:lstStyle/>
+        <a:p>
+          <a:endParaRPr lang="en-US"/>
+        </a:p>
+      </dgm:t>
+    </dgm:pt>
+    <dgm:pt modelId="{CC8A7901-76F3-4151-B713-CAF457143C79}" type="pres">
+      <dgm:prSet presAssocID="{C71A931B-CE55-419D-BEC3-0BA06FBE20F4}" presName="linear" presStyleCnt="0">
+        <dgm:presLayoutVars>
+          <dgm:animLvl val="lvl"/>
+          <dgm:resizeHandles val="exact"/>
+        </dgm:presLayoutVars>
+      </dgm:prSet>
+      <dgm:spPr/>
+    </dgm:pt>
+    <dgm:pt modelId="{0201406B-508C-4210-A931-E23ED7EFB2E2}" type="pres">
+      <dgm:prSet presAssocID="{C7E98650-DCD6-4A4F-99B0-28E4238F7498}" presName="parentText" presStyleLbl="node1" presStyleIdx="0" presStyleCnt="4">
+        <dgm:presLayoutVars>
+          <dgm:chMax val="0"/>
+          <dgm:bulletEnabled val="1"/>
+        </dgm:presLayoutVars>
+      </dgm:prSet>
+      <dgm:spPr/>
+    </dgm:pt>
+    <dgm:pt modelId="{4CB2AFE0-571D-4CA9-9954-02A35B1861D2}" type="pres">
+      <dgm:prSet presAssocID="{C7E98650-DCD6-4A4F-99B0-28E4238F7498}" presName="childText" presStyleLbl="revTx" presStyleIdx="0" presStyleCnt="4">
+        <dgm:presLayoutVars>
+          <dgm:bulletEnabled val="1"/>
+        </dgm:presLayoutVars>
+      </dgm:prSet>
+      <dgm:spPr/>
+    </dgm:pt>
+    <dgm:pt modelId="{A8DEF6C2-7606-4344-96D5-F182AFFBDAC4}" type="pres">
+      <dgm:prSet presAssocID="{9354A0FF-B808-4F07-ADBF-56180FF13F2B}" presName="parentText" presStyleLbl="node1" presStyleIdx="1" presStyleCnt="4">
+        <dgm:presLayoutVars>
+          <dgm:chMax val="0"/>
+          <dgm:bulletEnabled val="1"/>
+        </dgm:presLayoutVars>
+      </dgm:prSet>
+      <dgm:spPr/>
+    </dgm:pt>
+    <dgm:pt modelId="{3DE93529-84C9-49B4-9C90-61880043735B}" type="pres">
+      <dgm:prSet presAssocID="{9354A0FF-B808-4F07-ADBF-56180FF13F2B}" presName="childText" presStyleLbl="revTx" presStyleIdx="1" presStyleCnt="4">
+        <dgm:presLayoutVars>
+          <dgm:bulletEnabled val="1"/>
+        </dgm:presLayoutVars>
+      </dgm:prSet>
+      <dgm:spPr/>
+    </dgm:pt>
+    <dgm:pt modelId="{A017DB6C-B4FF-47A2-A879-4439EE260F47}" type="pres">
+      <dgm:prSet presAssocID="{46D3DE61-8590-4E6D-A308-DBEF8D7F68E3}" presName="parentText" presStyleLbl="node1" presStyleIdx="2" presStyleCnt="4">
+        <dgm:presLayoutVars>
+          <dgm:chMax val="0"/>
+          <dgm:bulletEnabled val="1"/>
+        </dgm:presLayoutVars>
+      </dgm:prSet>
+      <dgm:spPr/>
+    </dgm:pt>
+    <dgm:pt modelId="{2A10E56D-7564-496C-970C-FC019646D0A3}" type="pres">
+      <dgm:prSet presAssocID="{46D3DE61-8590-4E6D-A308-DBEF8D7F68E3}" presName="childText" presStyleLbl="revTx" presStyleIdx="2" presStyleCnt="4">
+        <dgm:presLayoutVars>
+          <dgm:bulletEnabled val="1"/>
+        </dgm:presLayoutVars>
+      </dgm:prSet>
+      <dgm:spPr/>
+    </dgm:pt>
+    <dgm:pt modelId="{41855756-8E37-4B1D-A771-B0D84A0BCA3C}" type="pres">
+      <dgm:prSet presAssocID="{BBE45022-DD26-46B6-AF22-52D705AF7081}" presName="parentText" presStyleLbl="node1" presStyleIdx="3" presStyleCnt="4">
+        <dgm:presLayoutVars>
+          <dgm:chMax val="0"/>
+          <dgm:bulletEnabled val="1"/>
+        </dgm:presLayoutVars>
+      </dgm:prSet>
+      <dgm:spPr/>
+    </dgm:pt>
+    <dgm:pt modelId="{7B378BDB-08DC-4842-9FFD-3EA5B2E34072}" type="pres">
+      <dgm:prSet presAssocID="{BBE45022-DD26-46B6-AF22-52D705AF7081}" presName="childText" presStyleLbl="revTx" presStyleIdx="3" presStyleCnt="4">
+        <dgm:presLayoutVars>
+          <dgm:bulletEnabled val="1"/>
+        </dgm:presLayoutVars>
+      </dgm:prSet>
+      <dgm:spPr/>
+    </dgm:pt>
+  </dgm:ptLst>
+  <dgm:cxnLst>
+    <dgm:cxn modelId="{302E3B06-FAAE-4BC5-A37E-7F0AAABA27C4}" type="presOf" srcId="{8576DB89-BAD8-4662-9215-F9A76D63D815}" destId="{7B378BDB-08DC-4842-9FFD-3EA5B2E34072}" srcOrd="0" destOrd="0" presId="urn:microsoft.com/office/officeart/2005/8/layout/vList2"/>
+    <dgm:cxn modelId="{7571170F-142F-437C-9D8D-75F23D1E0B7E}" type="presOf" srcId="{BBE45022-DD26-46B6-AF22-52D705AF7081}" destId="{41855756-8E37-4B1D-A771-B0D84A0BCA3C}" srcOrd="0" destOrd="0" presId="urn:microsoft.com/office/officeart/2005/8/layout/vList2"/>
+    <dgm:cxn modelId="{B4B7ED11-A779-4A1F-B644-604796084E56}" type="presOf" srcId="{C71A931B-CE55-419D-BEC3-0BA06FBE20F4}" destId="{CC8A7901-76F3-4151-B713-CAF457143C79}" srcOrd="0" destOrd="0" presId="urn:microsoft.com/office/officeart/2005/8/layout/vList2"/>
+    <dgm:cxn modelId="{5F806B13-1236-4B2C-B936-E2ED865EB82C}" srcId="{C71A931B-CE55-419D-BEC3-0BA06FBE20F4}" destId="{C7E98650-DCD6-4A4F-99B0-28E4238F7498}" srcOrd="0" destOrd="0" parTransId="{9B86215B-9B1D-4A2A-BD08-93BADA2D4FF8}" sibTransId="{B7C5BAC5-1C92-4590-ABEB-F8CE18DB5C67}"/>
+    <dgm:cxn modelId="{FD7AFC24-09E2-4137-A8A9-1DA3C8A73819}" type="presOf" srcId="{46D3DE61-8590-4E6D-A308-DBEF8D7F68E3}" destId="{A017DB6C-B4FF-47A2-A879-4439EE260F47}" srcOrd="0" destOrd="0" presId="urn:microsoft.com/office/officeart/2005/8/layout/vList2"/>
+    <dgm:cxn modelId="{3FCE132C-4961-4ACE-A1FE-AC1712B35620}" srcId="{46D3DE61-8590-4E6D-A308-DBEF8D7F68E3}" destId="{D20DD158-91D3-45A9-8393-29B9920CC9AB}" srcOrd="0" destOrd="0" parTransId="{181621CA-9F2E-4636-9440-7D5FF03EE1AB}" sibTransId="{61682AC1-34B4-4F4C-A828-663B1C036B25}"/>
+    <dgm:cxn modelId="{9765A160-8AEB-4324-852A-50DA6B7399A8}" type="presOf" srcId="{3767A6D3-27E9-4597-B744-09CE719848F2}" destId="{3DE93529-84C9-49B4-9C90-61880043735B}" srcOrd="0" destOrd="0" presId="urn:microsoft.com/office/officeart/2005/8/layout/vList2"/>
+    <dgm:cxn modelId="{BE63C760-405A-41C9-8AC7-991C08F2B096}" srcId="{C7E98650-DCD6-4A4F-99B0-28E4238F7498}" destId="{221EFABD-9B0F-4301-B586-624A5905EE3E}" srcOrd="0" destOrd="0" parTransId="{20E22F03-50CB-4780-9009-2EB50FDB8E2D}" sibTransId="{0375F0C1-BFCA-49F5-B819-97FB65DDC92F}"/>
+    <dgm:cxn modelId="{4D9F2563-8823-41AD-AD86-CBA41C11BAB8}" srcId="{9354A0FF-B808-4F07-ADBF-56180FF13F2B}" destId="{3767A6D3-27E9-4597-B744-09CE719848F2}" srcOrd="0" destOrd="0" parTransId="{E85C5CBC-EDB1-45C3-823D-A9F1AAE3E49D}" sibTransId="{4C8BA78D-909C-4EBF-88B9-5834ACE7E8E3}"/>
+    <dgm:cxn modelId="{5C188645-F87F-4560-92E8-38BEB5E00774}" type="presOf" srcId="{C7E98650-DCD6-4A4F-99B0-28E4238F7498}" destId="{0201406B-508C-4210-A931-E23ED7EFB2E2}" srcOrd="0" destOrd="0" presId="urn:microsoft.com/office/officeart/2005/8/layout/vList2"/>
+    <dgm:cxn modelId="{1D2B3891-FF31-44B5-BA10-7F1E9DF3084E}" type="presOf" srcId="{221EFABD-9B0F-4301-B586-624A5905EE3E}" destId="{4CB2AFE0-571D-4CA9-9954-02A35B1861D2}" srcOrd="0" destOrd="0" presId="urn:microsoft.com/office/officeart/2005/8/layout/vList2"/>
+    <dgm:cxn modelId="{75A37EA3-4FF4-4FAA-B681-126760017C4B}" srcId="{C71A931B-CE55-419D-BEC3-0BA06FBE20F4}" destId="{9354A0FF-B808-4F07-ADBF-56180FF13F2B}" srcOrd="1" destOrd="0" parTransId="{6B514570-4B59-4C6D-9ED0-4E85AD748AD5}" sibTransId="{5A5389A3-B94E-45FE-A5C4-F2DC4F5E9FD2}"/>
+    <dgm:cxn modelId="{714B9BA5-3881-486C-8ADF-08C69663E8BD}" type="presOf" srcId="{9354A0FF-B808-4F07-ADBF-56180FF13F2B}" destId="{A8DEF6C2-7606-4344-96D5-F182AFFBDAC4}" srcOrd="0" destOrd="0" presId="urn:microsoft.com/office/officeart/2005/8/layout/vList2"/>
+    <dgm:cxn modelId="{71B7FCA8-DF88-4BB9-BFCD-B1F2B45E0155}" srcId="{BBE45022-DD26-46B6-AF22-52D705AF7081}" destId="{8576DB89-BAD8-4662-9215-F9A76D63D815}" srcOrd="0" destOrd="0" parTransId="{D9AD628D-DF33-4E10-8125-37E01DCFD022}" sibTransId="{9E3BE0B4-7028-4C55-81FB-D9D02D12F07C}"/>
+    <dgm:cxn modelId="{A8CC14CF-0B37-4148-8757-A6D9A2A63D39}" type="presOf" srcId="{D20DD158-91D3-45A9-8393-29B9920CC9AB}" destId="{2A10E56D-7564-496C-970C-FC019646D0A3}" srcOrd="0" destOrd="0" presId="urn:microsoft.com/office/officeart/2005/8/layout/vList2"/>
+    <dgm:cxn modelId="{8D7560E2-A953-4BDA-9E53-37A74EAF6A12}" srcId="{C71A931B-CE55-419D-BEC3-0BA06FBE20F4}" destId="{BBE45022-DD26-46B6-AF22-52D705AF7081}" srcOrd="3" destOrd="0" parTransId="{F9A60702-DD57-4DE3-8B21-9B9D357F9C68}" sibTransId="{C2C6B726-963F-446C-97D0-5C4CDFC186A5}"/>
+    <dgm:cxn modelId="{670FADEE-C1D6-468B-B878-B81CBD5DBD1D}" srcId="{C71A931B-CE55-419D-BEC3-0BA06FBE20F4}" destId="{46D3DE61-8590-4E6D-A308-DBEF8D7F68E3}" srcOrd="2" destOrd="0" parTransId="{AB3F3B8D-88E1-432C-A6B3-97AA9C2BF304}" sibTransId="{54110DCC-DB50-494B-AF89-3D50BC429A8A}"/>
+    <dgm:cxn modelId="{1C0F4A38-2FFC-4C63-968F-43F02330E61F}" type="presParOf" srcId="{CC8A7901-76F3-4151-B713-CAF457143C79}" destId="{0201406B-508C-4210-A931-E23ED7EFB2E2}" srcOrd="0" destOrd="0" presId="urn:microsoft.com/office/officeart/2005/8/layout/vList2"/>
+    <dgm:cxn modelId="{56F304F7-8A7C-4C0E-A52C-04A1BDB74376}" type="presParOf" srcId="{CC8A7901-76F3-4151-B713-CAF457143C79}" destId="{4CB2AFE0-571D-4CA9-9954-02A35B1861D2}" srcOrd="1" destOrd="0" presId="urn:microsoft.com/office/officeart/2005/8/layout/vList2"/>
+    <dgm:cxn modelId="{2152E073-D029-4D68-ABDD-2431DEE45285}" type="presParOf" srcId="{CC8A7901-76F3-4151-B713-CAF457143C79}" destId="{A8DEF6C2-7606-4344-96D5-F182AFFBDAC4}" srcOrd="2" destOrd="0" presId="urn:microsoft.com/office/officeart/2005/8/layout/vList2"/>
+    <dgm:cxn modelId="{474BB09C-E91F-4989-BA6A-8C19429166F9}" type="presParOf" srcId="{CC8A7901-76F3-4151-B713-CAF457143C79}" destId="{3DE93529-84C9-49B4-9C90-61880043735B}" srcOrd="3" destOrd="0" presId="urn:microsoft.com/office/officeart/2005/8/layout/vList2"/>
+    <dgm:cxn modelId="{2CCF0588-AD63-4A1F-B10A-0D91526F554B}" type="presParOf" srcId="{CC8A7901-76F3-4151-B713-CAF457143C79}" destId="{A017DB6C-B4FF-47A2-A879-4439EE260F47}" srcOrd="4" destOrd="0" presId="urn:microsoft.com/office/officeart/2005/8/layout/vList2"/>
+    <dgm:cxn modelId="{C527793D-AC34-4A51-A911-F70A78663514}" type="presParOf" srcId="{CC8A7901-76F3-4151-B713-CAF457143C79}" destId="{2A10E56D-7564-496C-970C-FC019646D0A3}" srcOrd="5" destOrd="0" presId="urn:microsoft.com/office/officeart/2005/8/layout/vList2"/>
+    <dgm:cxn modelId="{DFD0AB53-8D72-4273-88EF-6DD1B7B5B627}" type="presParOf" srcId="{CC8A7901-76F3-4151-B713-CAF457143C79}" destId="{41855756-8E37-4B1D-A771-B0D84A0BCA3C}" srcOrd="6" destOrd="0" presId="urn:microsoft.com/office/officeart/2005/8/layout/vList2"/>
+    <dgm:cxn modelId="{DE78F20C-4EA5-4063-840D-9E5D36291CBE}" type="presParOf" srcId="{CC8A7901-76F3-4151-B713-CAF457143C79}" destId="{7B378BDB-08DC-4842-9FFD-3EA5B2E34072}" srcOrd="7" destOrd="0" presId="urn:microsoft.com/office/officeart/2005/8/layout/vList2"/>
+  </dgm:cxnLst>
+  <dgm:bg/>
+  <dgm:whole/>
+  <dgm:extLst>
+    <a:ext uri="http://schemas.microsoft.com/office/drawing/2008/diagram">
+      <dsp:dataModelExt xmlns:dsp="http://schemas.microsoft.com/office/drawing/2008/diagram" relId="rId6" minVer="http://schemas.openxmlformats.org/drawingml/2006/diagram"/>
+    </a:ext>
+  </dgm:extLst>
+</dgm:dataModel>
+</file>
+
+<file path=ppt/diagrams/data2.xml><?xml version="1.0" encoding="utf-8"?>
 <dgm:dataModel xmlns:dgm="http://schemas.openxmlformats.org/drawingml/2006/diagram" xmlns:a="http://schemas.openxmlformats.org/drawingml/2006/main">
   <dgm:ptLst>
     <dgm:pt modelId="{165F1E79-DC0A-4845-B045-F9556159AC26}" type="doc">
@@ -2415,7 +3706,7 @@
 </dgm:dataModel>
 </file>
 
-<file path=ppt/diagrams/data2.xml><?xml version="1.0" encoding="utf-8"?>
+<file path=ppt/diagrams/data3.xml><?xml version="1.0" encoding="utf-8"?>
 <dgm:dataModel xmlns:dgm="http://schemas.openxmlformats.org/drawingml/2006/diagram" xmlns:a="http://schemas.openxmlformats.org/drawingml/2006/main">
   <dgm:ptLst>
     <dgm:pt modelId="{622D6B37-6CB6-49FB-B40B-618D2AEBA07F}" type="doc">
@@ -2535,6 +3826,632 @@
 </file>
 
 <file path=ppt/diagrams/drawing1.xml><?xml version="1.0" encoding="utf-8"?>
+<dsp:drawing xmlns:dgm="http://schemas.openxmlformats.org/drawingml/2006/diagram" xmlns:dsp="http://schemas.microsoft.com/office/drawing/2008/diagram" xmlns:a="http://schemas.openxmlformats.org/drawingml/2006/main">
+  <dsp:spTree>
+    <dsp:nvGrpSpPr>
+      <dsp:cNvPr id="0" name=""/>
+      <dsp:cNvGrpSpPr/>
+    </dsp:nvGrpSpPr>
+    <dsp:grpSpPr/>
+    <dsp:sp modelId="{0201406B-508C-4210-A931-E23ED7EFB2E2}">
+      <dsp:nvSpPr>
+        <dsp:cNvPr id="0" name=""/>
+        <dsp:cNvSpPr/>
+      </dsp:nvSpPr>
+      <dsp:spPr>
+        <a:xfrm>
+          <a:off x="0" y="26711"/>
+          <a:ext cx="8946541" cy="655200"/>
+        </a:xfrm>
+        <a:prstGeom prst="roundRect">
+          <a:avLst/>
+        </a:prstGeom>
+        <a:noFill/>
+        <a:ln w="19050" cap="rnd" cmpd="sng" algn="ctr">
+          <a:solidFill>
+            <a:schemeClr val="lt1">
+              <a:hueOff val="0"/>
+              <a:satOff val="0"/>
+              <a:lumOff val="0"/>
+              <a:alphaOff val="0"/>
+            </a:schemeClr>
+          </a:solidFill>
+          <a:prstDash val="solid"/>
+        </a:ln>
+        <a:effectLst/>
+      </dsp:spPr>
+      <dsp:style>
+        <a:lnRef idx="2">
+          <a:scrgbClr r="0" g="0" b="0"/>
+        </a:lnRef>
+        <a:fillRef idx="1">
+          <a:scrgbClr r="0" g="0" b="0"/>
+        </a:fillRef>
+        <a:effectRef idx="0">
+          <a:scrgbClr r="0" g="0" b="0"/>
+        </a:effectRef>
+        <a:fontRef idx="minor">
+          <a:schemeClr val="lt1"/>
+        </a:fontRef>
+      </dsp:style>
+      <dsp:txBody>
+        <a:bodyPr spcFirstLastPara="0" vert="horz" wrap="square" lIns="76200" tIns="76200" rIns="76200" bIns="76200" numCol="1" spcCol="1270" anchor="ctr" anchorCtr="0">
+          <a:noAutofit/>
+        </a:bodyPr>
+        <a:lstStyle/>
+        <a:p>
+          <a:pPr marL="0" lvl="0" indent="0" algn="l" defTabSz="889000">
+            <a:lnSpc>
+              <a:spcPct val="90000"/>
+            </a:lnSpc>
+            <a:spcBef>
+              <a:spcPct val="0"/>
+            </a:spcBef>
+            <a:spcAft>
+              <a:spcPct val="35000"/>
+            </a:spcAft>
+            <a:buNone/>
+          </a:pPr>
+          <a:r>
+            <a:rPr lang="en-US" sz="2000" b="1" kern="1200" dirty="0">
+              <a:latin typeface="Calibri" panose="020F0502020204030204" pitchFamily="34" charset="0"/>
+              <a:ea typeface="Calibri" panose="020F0502020204030204" pitchFamily="34" charset="0"/>
+              <a:cs typeface="Calibri" panose="020F0502020204030204" pitchFamily="34" charset="0"/>
+            </a:rPr>
+            <a:t>Model Choice - </a:t>
+          </a:r>
+          <a:r>
+            <a:rPr lang="es-ES" sz="2000" kern="1200" dirty="0">
+              <a:latin typeface="Calibri" panose="020F0502020204030204" pitchFamily="34" charset="0"/>
+              <a:ea typeface="Calibri" panose="020F0502020204030204" pitchFamily="34" charset="0"/>
+              <a:cs typeface="Calibri" panose="020F0502020204030204" pitchFamily="34" charset="0"/>
+            </a:rPr>
+            <a:t>Used local LLaMA via Ollama</a:t>
+          </a:r>
+          <a:endParaRPr lang="en-US" sz="2000" b="1" kern="1200" dirty="0">
+            <a:latin typeface="Calibri" panose="020F0502020204030204" pitchFamily="34" charset="0"/>
+            <a:ea typeface="Calibri" panose="020F0502020204030204" pitchFamily="34" charset="0"/>
+            <a:cs typeface="Calibri" panose="020F0502020204030204" pitchFamily="34" charset="0"/>
+          </a:endParaRPr>
+        </a:p>
+      </dsp:txBody>
+      <dsp:txXfrm>
+        <a:off x="31984" y="58695"/>
+        <a:ext cx="8882573" cy="591232"/>
+      </dsp:txXfrm>
+    </dsp:sp>
+    <dsp:sp modelId="{4CB2AFE0-571D-4CA9-9954-02A35B1861D2}">
+      <dsp:nvSpPr>
+        <dsp:cNvPr id="0" name=""/>
+        <dsp:cNvSpPr/>
+      </dsp:nvSpPr>
+      <dsp:spPr>
+        <a:xfrm>
+          <a:off x="0" y="681911"/>
+          <a:ext cx="8946541" cy="579600"/>
+        </a:xfrm>
+        <a:prstGeom prst="rect">
+          <a:avLst/>
+        </a:prstGeom>
+        <a:noFill/>
+        <a:ln>
+          <a:noFill/>
+        </a:ln>
+        <a:effectLst/>
+      </dsp:spPr>
+      <dsp:style>
+        <a:lnRef idx="0">
+          <a:scrgbClr r="0" g="0" b="0"/>
+        </a:lnRef>
+        <a:fillRef idx="0">
+          <a:scrgbClr r="0" g="0" b="0"/>
+        </a:fillRef>
+        <a:effectRef idx="0">
+          <a:scrgbClr r="0" g="0" b="0"/>
+        </a:effectRef>
+        <a:fontRef idx="minor"/>
+      </dsp:style>
+      <dsp:txBody>
+        <a:bodyPr spcFirstLastPara="0" vert="horz" wrap="square" lIns="284053" tIns="22860" rIns="128016" bIns="22860" numCol="1" spcCol="1270" anchor="t" anchorCtr="0">
+          <a:noAutofit/>
+        </a:bodyPr>
+        <a:lstStyle/>
+        <a:p>
+          <a:pPr marL="171450" lvl="1" indent="-171450" algn="l" defTabSz="800100">
+            <a:lnSpc>
+              <a:spcPct val="90000"/>
+            </a:lnSpc>
+            <a:spcBef>
+              <a:spcPct val="0"/>
+            </a:spcBef>
+            <a:spcAft>
+              <a:spcPct val="20000"/>
+            </a:spcAft>
+            <a:buNone/>
+          </a:pPr>
+          <a:r>
+            <a:rPr lang="en-US" sz="1800" kern="1200" dirty="0">
+              <a:latin typeface="Calibri" panose="020F0502020204030204" pitchFamily="34" charset="0"/>
+              <a:ea typeface="Calibri" panose="020F0502020204030204" pitchFamily="34" charset="0"/>
+              <a:cs typeface="Calibri" panose="020F0502020204030204" pitchFamily="34" charset="0"/>
+            </a:rPr>
+            <a:t>Reason: cost control + private deployment simulation</a:t>
+          </a:r>
+          <a:endParaRPr lang="en-US" sz="1900" kern="1200" dirty="0">
+            <a:latin typeface="Calibri" panose="020F0502020204030204" pitchFamily="34" charset="0"/>
+            <a:ea typeface="Calibri" panose="020F0502020204030204" pitchFamily="34" charset="0"/>
+            <a:cs typeface="Calibri" panose="020F0502020204030204" pitchFamily="34" charset="0"/>
+          </a:endParaRPr>
+        </a:p>
+      </dsp:txBody>
+      <dsp:txXfrm>
+        <a:off x="0" y="681911"/>
+        <a:ext cx="8946541" cy="579600"/>
+      </dsp:txXfrm>
+    </dsp:sp>
+    <dsp:sp modelId="{A8DEF6C2-7606-4344-96D5-F182AFFBDAC4}">
+      <dsp:nvSpPr>
+        <dsp:cNvPr id="0" name=""/>
+        <dsp:cNvSpPr/>
+      </dsp:nvSpPr>
+      <dsp:spPr>
+        <a:xfrm>
+          <a:off x="0" y="1261511"/>
+          <a:ext cx="8946541" cy="655200"/>
+        </a:xfrm>
+        <a:prstGeom prst="roundRect">
+          <a:avLst/>
+        </a:prstGeom>
+        <a:noFill/>
+        <a:ln w="19050" cap="rnd" cmpd="sng" algn="ctr">
+          <a:solidFill>
+            <a:schemeClr val="lt1">
+              <a:hueOff val="0"/>
+              <a:satOff val="0"/>
+              <a:lumOff val="0"/>
+              <a:alphaOff val="0"/>
+            </a:schemeClr>
+          </a:solidFill>
+          <a:prstDash val="solid"/>
+        </a:ln>
+        <a:effectLst/>
+      </dsp:spPr>
+      <dsp:style>
+        <a:lnRef idx="2">
+          <a:scrgbClr r="0" g="0" b="0"/>
+        </a:lnRef>
+        <a:fillRef idx="1">
+          <a:scrgbClr r="0" g="0" b="0"/>
+        </a:fillRef>
+        <a:effectRef idx="0">
+          <a:scrgbClr r="0" g="0" b="0"/>
+        </a:effectRef>
+        <a:fontRef idx="minor">
+          <a:schemeClr val="lt1"/>
+        </a:fontRef>
+      </dsp:style>
+      <dsp:txBody>
+        <a:bodyPr spcFirstLastPara="0" vert="horz" wrap="square" lIns="76200" tIns="76200" rIns="76200" bIns="76200" numCol="1" spcCol="1270" anchor="ctr" anchorCtr="0">
+          <a:noAutofit/>
+        </a:bodyPr>
+        <a:lstStyle/>
+        <a:p>
+          <a:pPr marL="0" lvl="0" indent="0" algn="l" defTabSz="889000">
+            <a:lnSpc>
+              <a:spcPct val="90000"/>
+            </a:lnSpc>
+            <a:spcBef>
+              <a:spcPct val="0"/>
+            </a:spcBef>
+            <a:spcAft>
+              <a:spcPct val="35000"/>
+            </a:spcAft>
+            <a:buNone/>
+          </a:pPr>
+          <a:r>
+            <a:rPr lang="en-US" sz="2000" b="1" kern="1200" dirty="0">
+              <a:latin typeface="Calibri" panose="020F0502020204030204" pitchFamily="34" charset="0"/>
+              <a:ea typeface="Calibri" panose="020F0502020204030204" pitchFamily="34" charset="0"/>
+              <a:cs typeface="Calibri" panose="020F0502020204030204" pitchFamily="34" charset="0"/>
+            </a:rPr>
+            <a:t>Embedding Model - </a:t>
+          </a:r>
+          <a:r>
+            <a:rPr lang="en-US" sz="2000" kern="1200" dirty="0">
+              <a:latin typeface="Calibri" panose="020F0502020204030204" pitchFamily="34" charset="0"/>
+              <a:ea typeface="Calibri" panose="020F0502020204030204" pitchFamily="34" charset="0"/>
+              <a:cs typeface="Calibri" panose="020F0502020204030204" pitchFamily="34" charset="0"/>
+            </a:rPr>
+            <a:t>sentence-transformers</a:t>
+          </a:r>
+          <a:endParaRPr lang="en-US" sz="2000" b="1" kern="1200" dirty="0">
+            <a:latin typeface="Calibri" panose="020F0502020204030204" pitchFamily="34" charset="0"/>
+            <a:ea typeface="Calibri" panose="020F0502020204030204" pitchFamily="34" charset="0"/>
+            <a:cs typeface="Calibri" panose="020F0502020204030204" pitchFamily="34" charset="0"/>
+          </a:endParaRPr>
+        </a:p>
+      </dsp:txBody>
+      <dsp:txXfrm>
+        <a:off x="31984" y="1293495"/>
+        <a:ext cx="8882573" cy="591232"/>
+      </dsp:txXfrm>
+    </dsp:sp>
+    <dsp:sp modelId="{3DE93529-84C9-49B4-9C90-61880043735B}">
+      <dsp:nvSpPr>
+        <dsp:cNvPr id="0" name=""/>
+        <dsp:cNvSpPr/>
+      </dsp:nvSpPr>
+      <dsp:spPr>
+        <a:xfrm>
+          <a:off x="0" y="1916711"/>
+          <a:ext cx="8946541" cy="579600"/>
+        </a:xfrm>
+        <a:prstGeom prst="rect">
+          <a:avLst/>
+        </a:prstGeom>
+        <a:noFill/>
+        <a:ln>
+          <a:noFill/>
+        </a:ln>
+        <a:effectLst/>
+      </dsp:spPr>
+      <dsp:style>
+        <a:lnRef idx="0">
+          <a:scrgbClr r="0" g="0" b="0"/>
+        </a:lnRef>
+        <a:fillRef idx="0">
+          <a:scrgbClr r="0" g="0" b="0"/>
+        </a:fillRef>
+        <a:effectRef idx="0">
+          <a:scrgbClr r="0" g="0" b="0"/>
+        </a:effectRef>
+        <a:fontRef idx="minor"/>
+      </dsp:style>
+      <dsp:txBody>
+        <a:bodyPr spcFirstLastPara="0" vert="horz" wrap="square" lIns="284053" tIns="22860" rIns="128016" bIns="22860" numCol="1" spcCol="1270" anchor="t" anchorCtr="0">
+          <a:noAutofit/>
+        </a:bodyPr>
+        <a:lstStyle/>
+        <a:p>
+          <a:pPr marL="171450" lvl="1" indent="-171450" algn="l" defTabSz="800100">
+            <a:lnSpc>
+              <a:spcPct val="90000"/>
+            </a:lnSpc>
+            <a:spcBef>
+              <a:spcPct val="0"/>
+            </a:spcBef>
+            <a:spcAft>
+              <a:spcPct val="20000"/>
+            </a:spcAft>
+            <a:buNone/>
+          </a:pPr>
+          <a:r>
+            <a:rPr lang="en-US" sz="1800" kern="1200" dirty="0">
+              <a:latin typeface="Calibri" panose="020F0502020204030204" pitchFamily="34" charset="0"/>
+              <a:ea typeface="Calibri" panose="020F0502020204030204" pitchFamily="34" charset="0"/>
+              <a:cs typeface="Calibri" panose="020F0502020204030204" pitchFamily="34" charset="0"/>
+            </a:rPr>
+            <a:t>Tradeoff: smaller model vs embedding richness(lightweight, CPU-friendly)</a:t>
+          </a:r>
+        </a:p>
+      </dsp:txBody>
+      <dsp:txXfrm>
+        <a:off x="0" y="1916711"/>
+        <a:ext cx="8946541" cy="579600"/>
+      </dsp:txXfrm>
+    </dsp:sp>
+    <dsp:sp modelId="{A017DB6C-B4FF-47A2-A879-4439EE260F47}">
+      <dsp:nvSpPr>
+        <dsp:cNvPr id="0" name=""/>
+        <dsp:cNvSpPr/>
+      </dsp:nvSpPr>
+      <dsp:spPr>
+        <a:xfrm>
+          <a:off x="0" y="2496311"/>
+          <a:ext cx="8946541" cy="655200"/>
+        </a:xfrm>
+        <a:prstGeom prst="roundRect">
+          <a:avLst/>
+        </a:prstGeom>
+        <a:noFill/>
+        <a:ln w="19050" cap="rnd" cmpd="sng" algn="ctr">
+          <a:solidFill>
+            <a:schemeClr val="lt1">
+              <a:hueOff val="0"/>
+              <a:satOff val="0"/>
+              <a:lumOff val="0"/>
+              <a:alphaOff val="0"/>
+            </a:schemeClr>
+          </a:solidFill>
+          <a:prstDash val="solid"/>
+        </a:ln>
+        <a:effectLst/>
+      </dsp:spPr>
+      <dsp:style>
+        <a:lnRef idx="2">
+          <a:scrgbClr r="0" g="0" b="0"/>
+        </a:lnRef>
+        <a:fillRef idx="1">
+          <a:scrgbClr r="0" g="0" b="0"/>
+        </a:fillRef>
+        <a:effectRef idx="0">
+          <a:scrgbClr r="0" g="0" b="0"/>
+        </a:effectRef>
+        <a:fontRef idx="minor">
+          <a:schemeClr val="lt1"/>
+        </a:fontRef>
+      </dsp:style>
+      <dsp:txBody>
+        <a:bodyPr spcFirstLastPara="0" vert="horz" wrap="square" lIns="76200" tIns="76200" rIns="76200" bIns="76200" numCol="1" spcCol="1270" anchor="ctr" anchorCtr="0">
+          <a:noAutofit/>
+        </a:bodyPr>
+        <a:lstStyle/>
+        <a:p>
+          <a:pPr marL="0" lvl="0" indent="0" algn="l" defTabSz="889000">
+            <a:lnSpc>
+              <a:spcPct val="90000"/>
+            </a:lnSpc>
+            <a:spcBef>
+              <a:spcPct val="0"/>
+            </a:spcBef>
+            <a:spcAft>
+              <a:spcPct val="35000"/>
+            </a:spcAft>
+            <a:buNone/>
+          </a:pPr>
+          <a:r>
+            <a:rPr lang="en-US" sz="2000" b="1" kern="1200" dirty="0">
+              <a:latin typeface="Calibri" panose="020F0502020204030204" pitchFamily="34" charset="0"/>
+              <a:ea typeface="Calibri" panose="020F0502020204030204" pitchFamily="34" charset="0"/>
+              <a:cs typeface="Calibri" panose="020F0502020204030204" pitchFamily="34" charset="0"/>
+            </a:rPr>
+            <a:t>Vector Store - </a:t>
+          </a:r>
+          <a:r>
+            <a:rPr lang="en-US" sz="2000" kern="1200" dirty="0">
+              <a:latin typeface="Calibri" panose="020F0502020204030204" pitchFamily="34" charset="0"/>
+              <a:ea typeface="Calibri" panose="020F0502020204030204" pitchFamily="34" charset="0"/>
+              <a:cs typeface="Calibri" panose="020F0502020204030204" pitchFamily="34" charset="0"/>
+            </a:rPr>
+            <a:t>Chroma</a:t>
+          </a:r>
+          <a:endParaRPr lang="en-US" sz="2000" b="1" kern="1200" dirty="0">
+            <a:latin typeface="Calibri" panose="020F0502020204030204" pitchFamily="34" charset="0"/>
+            <a:ea typeface="Calibri" panose="020F0502020204030204" pitchFamily="34" charset="0"/>
+            <a:cs typeface="Calibri" panose="020F0502020204030204" pitchFamily="34" charset="0"/>
+          </a:endParaRPr>
+        </a:p>
+      </dsp:txBody>
+      <dsp:txXfrm>
+        <a:off x="31984" y="2528295"/>
+        <a:ext cx="8882573" cy="591232"/>
+      </dsp:txXfrm>
+    </dsp:sp>
+    <dsp:sp modelId="{2A10E56D-7564-496C-970C-FC019646D0A3}">
+      <dsp:nvSpPr>
+        <dsp:cNvPr id="0" name=""/>
+        <dsp:cNvSpPr/>
+      </dsp:nvSpPr>
+      <dsp:spPr>
+        <a:xfrm>
+          <a:off x="0" y="3151511"/>
+          <a:ext cx="8946541" cy="579600"/>
+        </a:xfrm>
+        <a:prstGeom prst="rect">
+          <a:avLst/>
+        </a:prstGeom>
+        <a:noFill/>
+        <a:ln>
+          <a:noFill/>
+        </a:ln>
+        <a:effectLst/>
+      </dsp:spPr>
+      <dsp:style>
+        <a:lnRef idx="0">
+          <a:scrgbClr r="0" g="0" b="0"/>
+        </a:lnRef>
+        <a:fillRef idx="0">
+          <a:scrgbClr r="0" g="0" b="0"/>
+        </a:fillRef>
+        <a:effectRef idx="0">
+          <a:scrgbClr r="0" g="0" b="0"/>
+        </a:effectRef>
+        <a:fontRef idx="minor"/>
+      </dsp:style>
+      <dsp:txBody>
+        <a:bodyPr spcFirstLastPara="0" vert="horz" wrap="square" lIns="284053" tIns="22860" rIns="128016" bIns="22860" numCol="1" spcCol="1270" anchor="t" anchorCtr="0">
+          <a:noAutofit/>
+        </a:bodyPr>
+        <a:lstStyle/>
+        <a:p>
+          <a:pPr marL="171450" lvl="1" indent="-171450" algn="l" defTabSz="800100">
+            <a:lnSpc>
+              <a:spcPct val="90000"/>
+            </a:lnSpc>
+            <a:spcBef>
+              <a:spcPct val="0"/>
+            </a:spcBef>
+            <a:spcAft>
+              <a:spcPct val="20000"/>
+            </a:spcAft>
+            <a:buNone/>
+          </a:pPr>
+          <a:r>
+            <a:rPr lang="en-US" sz="1800" kern="1200" dirty="0">
+              <a:latin typeface="Calibri" panose="020F0502020204030204" pitchFamily="34" charset="0"/>
+              <a:ea typeface="Calibri" panose="020F0502020204030204" pitchFamily="34" charset="0"/>
+              <a:cs typeface="Calibri" panose="020F0502020204030204" pitchFamily="34" charset="0"/>
+            </a:rPr>
+            <a:t>Reason: simple setup, fast local indexing</a:t>
+          </a:r>
+          <a:endParaRPr lang="en-US" sz="1900" kern="1200" dirty="0">
+            <a:latin typeface="Calibri" panose="020F0502020204030204" pitchFamily="34" charset="0"/>
+            <a:ea typeface="Calibri" panose="020F0502020204030204" pitchFamily="34" charset="0"/>
+            <a:cs typeface="Calibri" panose="020F0502020204030204" pitchFamily="34" charset="0"/>
+          </a:endParaRPr>
+        </a:p>
+      </dsp:txBody>
+      <dsp:txXfrm>
+        <a:off x="0" y="3151511"/>
+        <a:ext cx="8946541" cy="579600"/>
+      </dsp:txXfrm>
+    </dsp:sp>
+    <dsp:sp modelId="{41855756-8E37-4B1D-A771-B0D84A0BCA3C}">
+      <dsp:nvSpPr>
+        <dsp:cNvPr id="0" name=""/>
+        <dsp:cNvSpPr/>
+      </dsp:nvSpPr>
+      <dsp:spPr>
+        <a:xfrm>
+          <a:off x="0" y="3731112"/>
+          <a:ext cx="8946541" cy="655200"/>
+        </a:xfrm>
+        <a:prstGeom prst="roundRect">
+          <a:avLst/>
+        </a:prstGeom>
+        <a:noFill/>
+        <a:ln w="19050" cap="rnd" cmpd="sng" algn="ctr">
+          <a:solidFill>
+            <a:schemeClr val="lt1">
+              <a:hueOff val="0"/>
+              <a:satOff val="0"/>
+              <a:lumOff val="0"/>
+              <a:alphaOff val="0"/>
+            </a:schemeClr>
+          </a:solidFill>
+          <a:prstDash val="solid"/>
+        </a:ln>
+        <a:effectLst/>
+      </dsp:spPr>
+      <dsp:style>
+        <a:lnRef idx="2">
+          <a:scrgbClr r="0" g="0" b="0"/>
+        </a:lnRef>
+        <a:fillRef idx="1">
+          <a:scrgbClr r="0" g="0" b="0"/>
+        </a:fillRef>
+        <a:effectRef idx="0">
+          <a:scrgbClr r="0" g="0" b="0"/>
+        </a:effectRef>
+        <a:fontRef idx="minor">
+          <a:schemeClr val="lt1"/>
+        </a:fontRef>
+      </dsp:style>
+      <dsp:txBody>
+        <a:bodyPr spcFirstLastPara="0" vert="horz" wrap="square" lIns="76200" tIns="76200" rIns="76200" bIns="76200" numCol="1" spcCol="1270" anchor="ctr" anchorCtr="0">
+          <a:noAutofit/>
+        </a:bodyPr>
+        <a:lstStyle/>
+        <a:p>
+          <a:pPr marL="0" lvl="0" indent="0" algn="l" defTabSz="889000">
+            <a:lnSpc>
+              <a:spcPct val="90000"/>
+            </a:lnSpc>
+            <a:spcBef>
+              <a:spcPct val="0"/>
+            </a:spcBef>
+            <a:spcAft>
+              <a:spcPct val="35000"/>
+            </a:spcAft>
+            <a:buNone/>
+          </a:pPr>
+          <a:r>
+            <a:rPr lang="en-US" sz="2000" b="1" kern="1200" dirty="0">
+              <a:latin typeface="Calibri" panose="020F0502020204030204" pitchFamily="34" charset="0"/>
+              <a:ea typeface="Calibri" panose="020F0502020204030204" pitchFamily="34" charset="0"/>
+              <a:cs typeface="Calibri" panose="020F0502020204030204" pitchFamily="34" charset="0"/>
+            </a:rPr>
+            <a:t>Retrieval Strategy - </a:t>
+          </a:r>
+          <a:r>
+            <a:rPr lang="en-US" sz="2000" kern="1200" dirty="0">
+              <a:latin typeface="Calibri" panose="020F0502020204030204" pitchFamily="34" charset="0"/>
+              <a:ea typeface="Calibri" panose="020F0502020204030204" pitchFamily="34" charset="0"/>
+              <a:cs typeface="Calibri" panose="020F0502020204030204" pitchFamily="34" charset="0"/>
+            </a:rPr>
+            <a:t>Top-K + similarity threshold</a:t>
+          </a:r>
+          <a:endParaRPr lang="en-US" sz="2000" b="1" kern="1200" dirty="0">
+            <a:latin typeface="Calibri" panose="020F0502020204030204" pitchFamily="34" charset="0"/>
+            <a:ea typeface="Calibri" panose="020F0502020204030204" pitchFamily="34" charset="0"/>
+            <a:cs typeface="Calibri" panose="020F0502020204030204" pitchFamily="34" charset="0"/>
+          </a:endParaRPr>
+        </a:p>
+      </dsp:txBody>
+      <dsp:txXfrm>
+        <a:off x="31984" y="3763096"/>
+        <a:ext cx="8882573" cy="591232"/>
+      </dsp:txXfrm>
+    </dsp:sp>
+    <dsp:sp modelId="{7B378BDB-08DC-4842-9FFD-3EA5B2E34072}">
+      <dsp:nvSpPr>
+        <dsp:cNvPr id="0" name=""/>
+        <dsp:cNvSpPr/>
+      </dsp:nvSpPr>
+      <dsp:spPr>
+        <a:xfrm>
+          <a:off x="0" y="4386312"/>
+          <a:ext cx="8946541" cy="579600"/>
+        </a:xfrm>
+        <a:prstGeom prst="rect">
+          <a:avLst/>
+        </a:prstGeom>
+        <a:noFill/>
+        <a:ln>
+          <a:noFill/>
+        </a:ln>
+        <a:effectLst/>
+      </dsp:spPr>
+      <dsp:style>
+        <a:lnRef idx="0">
+          <a:scrgbClr r="0" g="0" b="0"/>
+        </a:lnRef>
+        <a:fillRef idx="0">
+          <a:scrgbClr r="0" g="0" b="0"/>
+        </a:fillRef>
+        <a:effectRef idx="0">
+          <a:scrgbClr r="0" g="0" b="0"/>
+        </a:effectRef>
+        <a:fontRef idx="minor"/>
+      </dsp:style>
+      <dsp:txBody>
+        <a:bodyPr spcFirstLastPara="0" vert="horz" wrap="square" lIns="284053" tIns="22860" rIns="128016" bIns="22860" numCol="1" spcCol="1270" anchor="t" anchorCtr="0">
+          <a:noAutofit/>
+        </a:bodyPr>
+        <a:lstStyle/>
+        <a:p>
+          <a:pPr marL="171450" lvl="1" indent="-171450" algn="l" defTabSz="800100">
+            <a:lnSpc>
+              <a:spcPct val="90000"/>
+            </a:lnSpc>
+            <a:spcBef>
+              <a:spcPct val="0"/>
+            </a:spcBef>
+            <a:spcAft>
+              <a:spcPct val="20000"/>
+            </a:spcAft>
+            <a:buNone/>
+          </a:pPr>
+          <a:r>
+            <a:rPr lang="en-US" sz="1800" kern="1200" dirty="0">
+              <a:latin typeface="Calibri" panose="020F0502020204030204" pitchFamily="34" charset="0"/>
+              <a:ea typeface="Calibri" panose="020F0502020204030204" pitchFamily="34" charset="0"/>
+              <a:cs typeface="Calibri" panose="020F0502020204030204" pitchFamily="34" charset="0"/>
+            </a:rPr>
+            <a:t>Tradeoff: precision vs recall</a:t>
+          </a:r>
+        </a:p>
+      </dsp:txBody>
+      <dsp:txXfrm>
+        <a:off x="0" y="4386312"/>
+        <a:ext cx="8946541" cy="579600"/>
+      </dsp:txXfrm>
+    </dsp:sp>
+  </dsp:spTree>
+</dsp:drawing>
+</file>
+
+<file path=ppt/diagrams/drawing2.xml><?xml version="1.0" encoding="utf-8"?>
 <dsp:drawing xmlns:dgm="http://schemas.openxmlformats.org/drawingml/2006/diagram" xmlns:dsp="http://schemas.microsoft.com/office/drawing/2008/diagram" xmlns:a="http://schemas.openxmlformats.org/drawingml/2006/main">
   <dsp:spTree>
     <dsp:nvGrpSpPr>
@@ -3243,7 +5160,7 @@
 </dsp:drawing>
 </file>
 
-<file path=ppt/diagrams/drawing2.xml><?xml version="1.0" encoding="utf-8"?>
+<file path=ppt/diagrams/drawing3.xml><?xml version="1.0" encoding="utf-8"?>
 <dsp:drawing xmlns:dgm="http://schemas.openxmlformats.org/drawingml/2006/diagram" xmlns:dsp="http://schemas.microsoft.com/office/drawing/2008/diagram" xmlns:a="http://schemas.openxmlformats.org/drawingml/2006/main">
   <dsp:spTree>
     <dsp:nvGrpSpPr>
@@ -3363,6 +5280,173 @@
 </file>
 
 <file path=ppt/diagrams/layout1.xml><?xml version="1.0" encoding="utf-8"?>
+<dgm:layoutDef xmlns:dgm="http://schemas.openxmlformats.org/drawingml/2006/diagram" xmlns:a="http://schemas.openxmlformats.org/drawingml/2006/main" uniqueId="urn:microsoft.com/office/officeart/2005/8/layout/vList2">
+  <dgm:title val=""/>
+  <dgm:desc val=""/>
+  <dgm:catLst>
+    <dgm:cat type="list" pri="3000"/>
+    <dgm:cat type="convert" pri="1000"/>
+  </dgm:catLst>
+  <dgm:sampData>
+    <dgm:dataModel>
+      <dgm:ptLst>
+        <dgm:pt modelId="0" type="doc"/>
+        <dgm:pt modelId="1">
+          <dgm:prSet phldr="1"/>
+        </dgm:pt>
+        <dgm:pt modelId="11">
+          <dgm:prSet phldr="1"/>
+        </dgm:pt>
+        <dgm:pt modelId="2">
+          <dgm:prSet phldr="1"/>
+        </dgm:pt>
+        <dgm:pt modelId="21">
+          <dgm:prSet phldr="1"/>
+        </dgm:pt>
+      </dgm:ptLst>
+      <dgm:cxnLst>
+        <dgm:cxn modelId="4" srcId="0" destId="1" srcOrd="0" destOrd="0"/>
+        <dgm:cxn modelId="5" srcId="0" destId="2" srcOrd="1" destOrd="0"/>
+        <dgm:cxn modelId="12" srcId="1" destId="11" srcOrd="0" destOrd="0"/>
+        <dgm:cxn modelId="23" srcId="2" destId="21" srcOrd="0" destOrd="0"/>
+      </dgm:cxnLst>
+      <dgm:bg/>
+      <dgm:whole/>
+    </dgm:dataModel>
+  </dgm:sampData>
+  <dgm:styleData>
+    <dgm:dataModel>
+      <dgm:ptLst>
+        <dgm:pt modelId="0" type="doc"/>
+        <dgm:pt modelId="1"/>
+        <dgm:pt modelId="2"/>
+      </dgm:ptLst>
+      <dgm:cxnLst>
+        <dgm:cxn modelId="3" srcId="0" destId="1" srcOrd="0" destOrd="0"/>
+        <dgm:cxn modelId="4" srcId="0" destId="2" srcOrd="1" destOrd="0"/>
+      </dgm:cxnLst>
+      <dgm:bg/>
+      <dgm:whole/>
+    </dgm:dataModel>
+  </dgm:styleData>
+  <dgm:clrData>
+    <dgm:dataModel>
+      <dgm:ptLst>
+        <dgm:pt modelId="0" type="doc"/>
+        <dgm:pt modelId="1"/>
+        <dgm:pt modelId="2"/>
+        <dgm:pt modelId="3"/>
+        <dgm:pt modelId="4"/>
+      </dgm:ptLst>
+      <dgm:cxnLst>
+        <dgm:cxn modelId="5" srcId="0" destId="1" srcOrd="0" destOrd="0"/>
+        <dgm:cxn modelId="6" srcId="0" destId="2" srcOrd="1" destOrd="0"/>
+        <dgm:cxn modelId="7" srcId="0" destId="3" srcOrd="2" destOrd="0"/>
+        <dgm:cxn modelId="8" srcId="0" destId="4" srcOrd="3" destOrd="0"/>
+      </dgm:cxnLst>
+      <dgm:bg/>
+      <dgm:whole/>
+    </dgm:dataModel>
+  </dgm:clrData>
+  <dgm:layoutNode name="linear">
+    <dgm:varLst>
+      <dgm:animLvl val="lvl"/>
+      <dgm:resizeHandles val="exact"/>
+    </dgm:varLst>
+    <dgm:alg type="lin">
+      <dgm:param type="linDir" val="fromT"/>
+      <dgm:param type="vertAlign" val="mid"/>
+    </dgm:alg>
+    <dgm:shape xmlns:r="http://schemas.openxmlformats.org/officeDocument/2006/relationships" r:blip="">
+      <dgm:adjLst/>
+    </dgm:shape>
+    <dgm:presOf/>
+    <dgm:constrLst>
+      <dgm:constr type="w" for="ch" forName="parentText" refType="w"/>
+      <dgm:constr type="h" for="ch" forName="parentText" refType="primFontSz" refFor="ch" refForName="parentText" fact="0.52"/>
+      <dgm:constr type="w" for="ch" forName="childText" refType="w"/>
+      <dgm:constr type="h" for="ch" forName="childText" refType="primFontSz" refFor="ch" refForName="parentText" fact="0.46"/>
+      <dgm:constr type="h" for="ch" forName="parentText" op="equ"/>
+      <dgm:constr type="primFontSz" for="ch" forName="parentText" op="equ" val="65"/>
+      <dgm:constr type="primFontSz" for="ch" forName="childText" refType="primFontSz" refFor="ch" refForName="parentText" op="equ"/>
+      <dgm:constr type="h" for="ch" forName="spacer" refType="primFontSz" refFor="ch" refForName="parentText" fact="0.08"/>
+    </dgm:constrLst>
+    <dgm:ruleLst>
+      <dgm:rule type="primFontSz" for="ch" forName="parentText" val="5" fact="NaN" max="NaN"/>
+    </dgm:ruleLst>
+    <dgm:forEach name="Name0" axis="ch" ptType="node">
+      <dgm:layoutNode name="parentText" styleLbl="node1">
+        <dgm:varLst>
+          <dgm:chMax val="0"/>
+          <dgm:bulletEnabled val="1"/>
+        </dgm:varLst>
+        <dgm:alg type="tx">
+          <dgm:param type="parTxLTRAlign" val="l"/>
+          <dgm:param type="parTxRTLAlign" val="r"/>
+        </dgm:alg>
+        <dgm:shape xmlns:r="http://schemas.openxmlformats.org/officeDocument/2006/relationships" type="roundRect" r:blip="">
+          <dgm:adjLst/>
+        </dgm:shape>
+        <dgm:presOf axis="self"/>
+        <dgm:constrLst>
+          <dgm:constr type="tMarg" refType="primFontSz" fact="0.3"/>
+          <dgm:constr type="bMarg" refType="primFontSz" fact="0.3"/>
+          <dgm:constr type="lMarg" refType="primFontSz" fact="0.3"/>
+          <dgm:constr type="rMarg" refType="primFontSz" fact="0.3"/>
+        </dgm:constrLst>
+        <dgm:ruleLst>
+          <dgm:rule type="h" val="INF" fact="NaN" max="NaN"/>
+        </dgm:ruleLst>
+      </dgm:layoutNode>
+      <dgm:choose name="Name1">
+        <dgm:if name="Name2" axis="ch" ptType="node" func="cnt" op="gte" val="1">
+          <dgm:layoutNode name="childText" styleLbl="revTx">
+            <dgm:varLst>
+              <dgm:bulletEnabled val="1"/>
+            </dgm:varLst>
+            <dgm:alg type="tx">
+              <dgm:param type="stBulletLvl" val="1"/>
+              <dgm:param type="lnSpAfChP" val="20"/>
+            </dgm:alg>
+            <dgm:shape xmlns:r="http://schemas.openxmlformats.org/officeDocument/2006/relationships" type="rect" r:blip="">
+              <dgm:adjLst/>
+            </dgm:shape>
+            <dgm:presOf axis="des" ptType="node"/>
+            <dgm:constrLst>
+              <dgm:constr type="tMarg" refType="primFontSz" fact="0.1"/>
+              <dgm:constr type="bMarg" refType="primFontSz" fact="0.1"/>
+              <dgm:constr type="lMarg" refType="w" fact="0.09"/>
+            </dgm:constrLst>
+            <dgm:ruleLst>
+              <dgm:rule type="h" val="INF" fact="NaN" max="NaN"/>
+            </dgm:ruleLst>
+          </dgm:layoutNode>
+        </dgm:if>
+        <dgm:else name="Name3">
+          <dgm:choose name="Name4">
+            <dgm:if name="Name5" axis="par ch" ptType="doc node" func="cnt" op="gte" val="2">
+              <dgm:forEach name="Name6" axis="followSib" ptType="sibTrans" cnt="1">
+                <dgm:layoutNode name="spacer">
+                  <dgm:alg type="sp"/>
+                  <dgm:shape xmlns:r="http://schemas.openxmlformats.org/officeDocument/2006/relationships" r:blip="">
+                    <dgm:adjLst/>
+                  </dgm:shape>
+                  <dgm:presOf/>
+                  <dgm:constrLst/>
+                  <dgm:ruleLst/>
+                </dgm:layoutNode>
+              </dgm:forEach>
+            </dgm:if>
+            <dgm:else name="Name7"/>
+          </dgm:choose>
+        </dgm:else>
+      </dgm:choose>
+    </dgm:forEach>
+  </dgm:layoutNode>
+</dgm:layoutDef>
+</file>
+
+<file path=ppt/diagrams/layout2.xml><?xml version="1.0" encoding="utf-8"?>
 <dgm:layoutDef xmlns:dgm="http://schemas.openxmlformats.org/drawingml/2006/diagram" xmlns:a="http://schemas.openxmlformats.org/drawingml/2006/main" uniqueId="urn:microsoft.com/office/officeart/2018/2/layout/IconLabelDescriptionList">
   <dgm:title val="Icon Label Description List"/>
   <dgm:desc val="Use to show non-sequential or grouped chunks of information. The placeholder holds an icon or small picture, and corresponding text boxes show Level 1 and Level 2 text respectively. Works well for minimal Level 1 text accompanied by lengthier Level two text."/>
@@ -3571,7 +5655,7 @@
 </dgm:layoutDef>
 </file>
 
-<file path=ppt/diagrams/layout2.xml><?xml version="1.0" encoding="utf-8"?>
+<file path=ppt/diagrams/layout3.xml><?xml version="1.0" encoding="utf-8"?>
 <dgm:layoutDef xmlns:dgm="http://schemas.openxmlformats.org/drawingml/2006/diagram" xmlns:a="http://schemas.openxmlformats.org/drawingml/2006/main" uniqueId="urn:microsoft.com/office/officeart/2005/8/layout/vList5">
   <dgm:title val=""/>
   <dgm:desc val=""/>
@@ -5872,6 +7956,1040 @@
 </dgm:styleDef>
 </file>
 
+<file path=ppt/diagrams/quickStyle3.xml><?xml version="1.0" encoding="utf-8"?>
+<dgm:styleDef xmlns:dgm="http://schemas.openxmlformats.org/drawingml/2006/diagram" xmlns:a="http://schemas.openxmlformats.org/drawingml/2006/main" uniqueId="urn:microsoft.com/office/officeart/2005/8/quickstyle/simple1">
+  <dgm:title val=""/>
+  <dgm:desc val=""/>
+  <dgm:catLst>
+    <dgm:cat type="simple" pri="10100"/>
+  </dgm:catLst>
+  <dgm:scene3d>
+    <a:camera prst="orthographicFront"/>
+    <a:lightRig rig="threePt" dir="t"/>
+  </dgm:scene3d>
+  <dgm:styleLbl name="node0">
+    <dgm:scene3d>
+      <a:camera prst="orthographicFront"/>
+      <a:lightRig rig="threePt" dir="t"/>
+    </dgm:scene3d>
+    <dgm:sp3d/>
+    <dgm:txPr/>
+    <dgm:style>
+      <a:lnRef idx="2">
+        <a:scrgbClr r="0" g="0" b="0"/>
+      </a:lnRef>
+      <a:fillRef idx="1">
+        <a:scrgbClr r="0" g="0" b="0"/>
+      </a:fillRef>
+      <a:effectRef idx="0">
+        <a:scrgbClr r="0" g="0" b="0"/>
+      </a:effectRef>
+      <a:fontRef idx="minor">
+        <a:schemeClr val="lt1"/>
+      </a:fontRef>
+    </dgm:style>
+  </dgm:styleLbl>
+  <dgm:styleLbl name="lnNode1">
+    <dgm:scene3d>
+      <a:camera prst="orthographicFront"/>
+      <a:lightRig rig="threePt" dir="t"/>
+    </dgm:scene3d>
+    <dgm:sp3d/>
+    <dgm:txPr/>
+    <dgm:style>
+      <a:lnRef idx="2">
+        <a:scrgbClr r="0" g="0" b="0"/>
+      </a:lnRef>
+      <a:fillRef idx="1">
+        <a:scrgbClr r="0" g="0" b="0"/>
+      </a:fillRef>
+      <a:effectRef idx="0">
+        <a:scrgbClr r="0" g="0" b="0"/>
+      </a:effectRef>
+      <a:fontRef idx="minor">
+        <a:schemeClr val="lt1"/>
+      </a:fontRef>
+    </dgm:style>
+  </dgm:styleLbl>
+  <dgm:styleLbl name="vennNode1">
+    <dgm:scene3d>
+      <a:camera prst="orthographicFront"/>
+      <a:lightRig rig="threePt" dir="t"/>
+    </dgm:scene3d>
+    <dgm:sp3d/>
+    <dgm:txPr/>
+    <dgm:style>
+      <a:lnRef idx="2">
+        <a:scrgbClr r="0" g="0" b="0"/>
+      </a:lnRef>
+      <a:fillRef idx="1">
+        <a:scrgbClr r="0" g="0" b="0"/>
+      </a:fillRef>
+      <a:effectRef idx="0">
+        <a:scrgbClr r="0" g="0" b="0"/>
+      </a:effectRef>
+      <a:fontRef idx="minor">
+        <a:schemeClr val="tx1"/>
+      </a:fontRef>
+    </dgm:style>
+  </dgm:styleLbl>
+  <dgm:styleLbl name="alignNode1">
+    <dgm:scene3d>
+      <a:camera prst="orthographicFront"/>
+      <a:lightRig rig="threePt" dir="t"/>
+    </dgm:scene3d>
+    <dgm:sp3d/>
+    <dgm:txPr/>
+    <dgm:style>
+      <a:lnRef idx="2">
+        <a:scrgbClr r="0" g="0" b="0"/>
+      </a:lnRef>
+      <a:fillRef idx="1">
+        <a:scrgbClr r="0" g="0" b="0"/>
+      </a:fillRef>
+      <a:effectRef idx="0">
+        <a:scrgbClr r="0" g="0" b="0"/>
+      </a:effectRef>
+      <a:fontRef idx="minor">
+        <a:schemeClr val="lt1"/>
+      </a:fontRef>
+    </dgm:style>
+  </dgm:styleLbl>
+  <dgm:styleLbl name="node1">
+    <dgm:scene3d>
+      <a:camera prst="orthographicFront"/>
+      <a:lightRig rig="threePt" dir="t"/>
+    </dgm:scene3d>
+    <dgm:sp3d/>
+    <dgm:txPr/>
+    <dgm:style>
+      <a:lnRef idx="2">
+        <a:scrgbClr r="0" g="0" b="0"/>
+      </a:lnRef>
+      <a:fillRef idx="1">
+        <a:scrgbClr r="0" g="0" b="0"/>
+      </a:fillRef>
+      <a:effectRef idx="0">
+        <a:scrgbClr r="0" g="0" b="0"/>
+      </a:effectRef>
+      <a:fontRef idx="minor">
+        <a:schemeClr val="lt1"/>
+      </a:fontRef>
+    </dgm:style>
+  </dgm:styleLbl>
+  <dgm:styleLbl name="node2">
+    <dgm:scene3d>
+      <a:camera prst="orthographicFront"/>
+      <a:lightRig rig="threePt" dir="t"/>
+    </dgm:scene3d>
+    <dgm:sp3d/>
+    <dgm:txPr/>
+    <dgm:style>
+      <a:lnRef idx="2">
+        <a:scrgbClr r="0" g="0" b="0"/>
+      </a:lnRef>
+      <a:fillRef idx="1">
+        <a:scrgbClr r="0" g="0" b="0"/>
+      </a:fillRef>
+      <a:effectRef idx="0">
+        <a:scrgbClr r="0" g="0" b="0"/>
+      </a:effectRef>
+      <a:fontRef idx="minor">
+        <a:schemeClr val="lt1"/>
+      </a:fontRef>
+    </dgm:style>
+  </dgm:styleLbl>
+  <dgm:styleLbl name="node3">
+    <dgm:scene3d>
+      <a:camera prst="orthographicFront"/>
+      <a:lightRig rig="threePt" dir="t"/>
+    </dgm:scene3d>
+    <dgm:sp3d/>
+    <dgm:txPr/>
+    <dgm:style>
+      <a:lnRef idx="2">
+        <a:scrgbClr r="0" g="0" b="0"/>
+      </a:lnRef>
+      <a:fillRef idx="1">
+        <a:scrgbClr r="0" g="0" b="0"/>
+      </a:fillRef>
+      <a:effectRef idx="0">
+        <a:scrgbClr r="0" g="0" b="0"/>
+      </a:effectRef>
+      <a:fontRef idx="minor">
+        <a:schemeClr val="lt1"/>
+      </a:fontRef>
+    </dgm:style>
+  </dgm:styleLbl>
+  <dgm:styleLbl name="node4">
+    <dgm:scene3d>
+      <a:camera prst="orthographicFront"/>
+      <a:lightRig rig="threePt" dir="t"/>
+    </dgm:scene3d>
+    <dgm:sp3d/>
+    <dgm:txPr/>
+    <dgm:style>
+      <a:lnRef idx="2">
+        <a:scrgbClr r="0" g="0" b="0"/>
+      </a:lnRef>
+      <a:fillRef idx="1">
+        <a:scrgbClr r="0" g="0" b="0"/>
+      </a:fillRef>
+      <a:effectRef idx="0">
+        <a:scrgbClr r="0" g="0" b="0"/>
+      </a:effectRef>
+      <a:fontRef idx="minor">
+        <a:schemeClr val="lt1"/>
+      </a:fontRef>
+    </dgm:style>
+  </dgm:styleLbl>
+  <dgm:styleLbl name="fgImgPlace1">
+    <dgm:scene3d>
+      <a:camera prst="orthographicFront"/>
+      <a:lightRig rig="threePt" dir="t"/>
+    </dgm:scene3d>
+    <dgm:sp3d/>
+    <dgm:txPr/>
+    <dgm:style>
+      <a:lnRef idx="2">
+        <a:scrgbClr r="0" g="0" b="0"/>
+      </a:lnRef>
+      <a:fillRef idx="1">
+        <a:scrgbClr r="0" g="0" b="0"/>
+      </a:fillRef>
+      <a:effectRef idx="0">
+        <a:scrgbClr r="0" g="0" b="0"/>
+      </a:effectRef>
+      <a:fontRef idx="minor"/>
+    </dgm:style>
+  </dgm:styleLbl>
+  <dgm:styleLbl name="alignImgPlace1">
+    <dgm:scene3d>
+      <a:camera prst="orthographicFront"/>
+      <a:lightRig rig="threePt" dir="t"/>
+    </dgm:scene3d>
+    <dgm:sp3d/>
+    <dgm:txPr/>
+    <dgm:style>
+      <a:lnRef idx="2">
+        <a:scrgbClr r="0" g="0" b="0"/>
+      </a:lnRef>
+      <a:fillRef idx="1">
+        <a:scrgbClr r="0" g="0" b="0"/>
+      </a:fillRef>
+      <a:effectRef idx="0">
+        <a:scrgbClr r="0" g="0" b="0"/>
+      </a:effectRef>
+      <a:fontRef idx="minor"/>
+    </dgm:style>
+  </dgm:styleLbl>
+  <dgm:styleLbl name="bgImgPlace1">
+    <dgm:scene3d>
+      <a:camera prst="orthographicFront"/>
+      <a:lightRig rig="threePt" dir="t"/>
+    </dgm:scene3d>
+    <dgm:sp3d/>
+    <dgm:txPr/>
+    <dgm:style>
+      <a:lnRef idx="2">
+        <a:scrgbClr r="0" g="0" b="0"/>
+      </a:lnRef>
+      <a:fillRef idx="1">
+        <a:scrgbClr r="0" g="0" b="0"/>
+      </a:fillRef>
+      <a:effectRef idx="0">
+        <a:scrgbClr r="0" g="0" b="0"/>
+      </a:effectRef>
+      <a:fontRef idx="minor"/>
+    </dgm:style>
+  </dgm:styleLbl>
+  <dgm:styleLbl name="sibTrans2D1">
+    <dgm:scene3d>
+      <a:camera prst="orthographicFront"/>
+      <a:lightRig rig="threePt" dir="t"/>
+    </dgm:scene3d>
+    <dgm:sp3d/>
+    <dgm:txPr/>
+    <dgm:style>
+      <a:lnRef idx="0">
+        <a:scrgbClr r="0" g="0" b="0"/>
+      </a:lnRef>
+      <a:fillRef idx="1">
+        <a:scrgbClr r="0" g="0" b="0"/>
+      </a:fillRef>
+      <a:effectRef idx="0">
+        <a:scrgbClr r="0" g="0" b="0"/>
+      </a:effectRef>
+      <a:fontRef idx="minor">
+        <a:schemeClr val="lt1"/>
+      </a:fontRef>
+    </dgm:style>
+  </dgm:styleLbl>
+  <dgm:styleLbl name="fgSibTrans2D1">
+    <dgm:scene3d>
+      <a:camera prst="orthographicFront"/>
+      <a:lightRig rig="threePt" dir="t"/>
+    </dgm:scene3d>
+    <dgm:sp3d/>
+    <dgm:txPr/>
+    <dgm:style>
+      <a:lnRef idx="0">
+        <a:scrgbClr r="0" g="0" b="0"/>
+      </a:lnRef>
+      <a:fillRef idx="1">
+        <a:scrgbClr r="0" g="0" b="0"/>
+      </a:fillRef>
+      <a:effectRef idx="0">
+        <a:scrgbClr r="0" g="0" b="0"/>
+      </a:effectRef>
+      <a:fontRef idx="minor">
+        <a:schemeClr val="lt1"/>
+      </a:fontRef>
+    </dgm:style>
+  </dgm:styleLbl>
+  <dgm:styleLbl name="bgSibTrans2D1">
+    <dgm:scene3d>
+      <a:camera prst="orthographicFront"/>
+      <a:lightRig rig="threePt" dir="t"/>
+    </dgm:scene3d>
+    <dgm:sp3d/>
+    <dgm:txPr/>
+    <dgm:style>
+      <a:lnRef idx="0">
+        <a:scrgbClr r="0" g="0" b="0"/>
+      </a:lnRef>
+      <a:fillRef idx="1">
+        <a:scrgbClr r="0" g="0" b="0"/>
+      </a:fillRef>
+      <a:effectRef idx="0">
+        <a:scrgbClr r="0" g="0" b="0"/>
+      </a:effectRef>
+      <a:fontRef idx="minor">
+        <a:schemeClr val="lt1"/>
+      </a:fontRef>
+    </dgm:style>
+  </dgm:styleLbl>
+  <dgm:styleLbl name="sibTrans1D1">
+    <dgm:scene3d>
+      <a:camera prst="orthographicFront"/>
+      <a:lightRig rig="threePt" dir="t"/>
+    </dgm:scene3d>
+    <dgm:sp3d/>
+    <dgm:txPr/>
+    <dgm:style>
+      <a:lnRef idx="1">
+        <a:scrgbClr r="0" g="0" b="0"/>
+      </a:lnRef>
+      <a:fillRef idx="0">
+        <a:scrgbClr r="0" g="0" b="0"/>
+      </a:fillRef>
+      <a:effectRef idx="0">
+        <a:scrgbClr r="0" g="0" b="0"/>
+      </a:effectRef>
+      <a:fontRef idx="minor"/>
+    </dgm:style>
+  </dgm:styleLbl>
+  <dgm:styleLbl name="callout">
+    <dgm:scene3d>
+      <a:camera prst="orthographicFront"/>
+      <a:lightRig rig="threePt" dir="t"/>
+    </dgm:scene3d>
+    <dgm:sp3d/>
+    <dgm:txPr/>
+    <dgm:style>
+      <a:lnRef idx="2">
+        <a:scrgbClr r="0" g="0" b="0"/>
+      </a:lnRef>
+      <a:fillRef idx="1">
+        <a:scrgbClr r="0" g="0" b="0"/>
+      </a:fillRef>
+      <a:effectRef idx="0">
+        <a:scrgbClr r="0" g="0" b="0"/>
+      </a:effectRef>
+      <a:fontRef idx="minor"/>
+    </dgm:style>
+  </dgm:styleLbl>
+  <dgm:styleLbl name="asst0">
+    <dgm:scene3d>
+      <a:camera prst="orthographicFront"/>
+      <a:lightRig rig="threePt" dir="t"/>
+    </dgm:scene3d>
+    <dgm:sp3d/>
+    <dgm:txPr/>
+    <dgm:style>
+      <a:lnRef idx="2">
+        <a:scrgbClr r="0" g="0" b="0"/>
+      </a:lnRef>
+      <a:fillRef idx="1">
+        <a:scrgbClr r="0" g="0" b="0"/>
+      </a:fillRef>
+      <a:effectRef idx="0">
+        <a:scrgbClr r="0" g="0" b="0"/>
+      </a:effectRef>
+      <a:fontRef idx="minor">
+        <a:schemeClr val="lt1"/>
+      </a:fontRef>
+    </dgm:style>
+  </dgm:styleLbl>
+  <dgm:styleLbl name="asst1">
+    <dgm:scene3d>
+      <a:camera prst="orthographicFront"/>
+      <a:lightRig rig="threePt" dir="t"/>
+    </dgm:scene3d>
+    <dgm:sp3d/>
+    <dgm:txPr/>
+    <dgm:style>
+      <a:lnRef idx="2">
+        <a:scrgbClr r="0" g="0" b="0"/>
+      </a:lnRef>
+      <a:fillRef idx="1">
+        <a:scrgbClr r="0" g="0" b="0"/>
+      </a:fillRef>
+      <a:effectRef idx="0">
+        <a:scrgbClr r="0" g="0" b="0"/>
+      </a:effectRef>
+      <a:fontRef idx="minor">
+        <a:schemeClr val="lt1"/>
+      </a:fontRef>
+    </dgm:style>
+  </dgm:styleLbl>
+  <dgm:styleLbl name="asst2">
+    <dgm:scene3d>
+      <a:camera prst="orthographicFront"/>
+      <a:lightRig rig="threePt" dir="t"/>
+    </dgm:scene3d>
+    <dgm:sp3d/>
+    <dgm:txPr/>
+    <dgm:style>
+      <a:lnRef idx="2">
+        <a:scrgbClr r="0" g="0" b="0"/>
+      </a:lnRef>
+      <a:fillRef idx="1">
+        <a:scrgbClr r="0" g="0" b="0"/>
+      </a:fillRef>
+      <a:effectRef idx="0">
+        <a:scrgbClr r="0" g="0" b="0"/>
+      </a:effectRef>
+      <a:fontRef idx="minor">
+        <a:schemeClr val="lt1"/>
+      </a:fontRef>
+    </dgm:style>
+  </dgm:styleLbl>
+  <dgm:styleLbl name="asst3">
+    <dgm:scene3d>
+      <a:camera prst="orthographicFront"/>
+      <a:lightRig rig="threePt" dir="t"/>
+    </dgm:scene3d>
+    <dgm:sp3d/>
+    <dgm:txPr/>
+    <dgm:style>
+      <a:lnRef idx="2">
+        <a:scrgbClr r="0" g="0" b="0"/>
+      </a:lnRef>
+      <a:fillRef idx="1">
+        <a:scrgbClr r="0" g="0" b="0"/>
+      </a:fillRef>
+      <a:effectRef idx="0">
+        <a:scrgbClr r="0" g="0" b="0"/>
+      </a:effectRef>
+      <a:fontRef idx="minor">
+        <a:schemeClr val="lt1"/>
+      </a:fontRef>
+    </dgm:style>
+  </dgm:styleLbl>
+  <dgm:styleLbl name="asst4">
+    <dgm:scene3d>
+      <a:camera prst="orthographicFront"/>
+      <a:lightRig rig="threePt" dir="t"/>
+    </dgm:scene3d>
+    <dgm:sp3d/>
+    <dgm:txPr/>
+    <dgm:style>
+      <a:lnRef idx="2">
+        <a:scrgbClr r="0" g="0" b="0"/>
+      </a:lnRef>
+      <a:fillRef idx="1">
+        <a:scrgbClr r="0" g="0" b="0"/>
+      </a:fillRef>
+      <a:effectRef idx="0">
+        <a:scrgbClr r="0" g="0" b="0"/>
+      </a:effectRef>
+      <a:fontRef idx="minor">
+        <a:schemeClr val="lt1"/>
+      </a:fontRef>
+    </dgm:style>
+  </dgm:styleLbl>
+  <dgm:styleLbl name="parChTrans2D1">
+    <dgm:scene3d>
+      <a:camera prst="orthographicFront"/>
+      <a:lightRig rig="threePt" dir="t"/>
+    </dgm:scene3d>
+    <dgm:sp3d/>
+    <dgm:txPr/>
+    <dgm:style>
+      <a:lnRef idx="2">
+        <a:scrgbClr r="0" g="0" b="0"/>
+      </a:lnRef>
+      <a:fillRef idx="1">
+        <a:scrgbClr r="0" g="0" b="0"/>
+      </a:fillRef>
+      <a:effectRef idx="0">
+        <a:scrgbClr r="0" g="0" b="0"/>
+      </a:effectRef>
+      <a:fontRef idx="minor">
+        <a:schemeClr val="lt1"/>
+      </a:fontRef>
+    </dgm:style>
+  </dgm:styleLbl>
+  <dgm:styleLbl name="parChTrans2D2">
+    <dgm:scene3d>
+      <a:camera prst="orthographicFront"/>
+      <a:lightRig rig="threePt" dir="t"/>
+    </dgm:scene3d>
+    <dgm:sp3d/>
+    <dgm:txPr/>
+    <dgm:style>
+      <a:lnRef idx="2">
+        <a:scrgbClr r="0" g="0" b="0"/>
+      </a:lnRef>
+      <a:fillRef idx="1">
+        <a:scrgbClr r="0" g="0" b="0"/>
+      </a:fillRef>
+      <a:effectRef idx="0">
+        <a:scrgbClr r="0" g="0" b="0"/>
+      </a:effectRef>
+      <a:fontRef idx="minor">
+        <a:schemeClr val="lt1"/>
+      </a:fontRef>
+    </dgm:style>
+  </dgm:styleLbl>
+  <dgm:styleLbl name="parChTrans2D3">
+    <dgm:scene3d>
+      <a:camera prst="orthographicFront"/>
+      <a:lightRig rig="threePt" dir="t"/>
+    </dgm:scene3d>
+    <dgm:sp3d/>
+    <dgm:txPr/>
+    <dgm:style>
+      <a:lnRef idx="2">
+        <a:scrgbClr r="0" g="0" b="0"/>
+      </a:lnRef>
+      <a:fillRef idx="1">
+        <a:scrgbClr r="0" g="0" b="0"/>
+      </a:fillRef>
+      <a:effectRef idx="0">
+        <a:scrgbClr r="0" g="0" b="0"/>
+      </a:effectRef>
+      <a:fontRef idx="minor">
+        <a:schemeClr val="lt1"/>
+      </a:fontRef>
+    </dgm:style>
+  </dgm:styleLbl>
+  <dgm:styleLbl name="parChTrans2D4">
+    <dgm:scene3d>
+      <a:camera prst="orthographicFront"/>
+      <a:lightRig rig="threePt" dir="t"/>
+    </dgm:scene3d>
+    <dgm:sp3d/>
+    <dgm:txPr/>
+    <dgm:style>
+      <a:lnRef idx="2">
+        <a:scrgbClr r="0" g="0" b="0"/>
+      </a:lnRef>
+      <a:fillRef idx="1">
+        <a:scrgbClr r="0" g="0" b="0"/>
+      </a:fillRef>
+      <a:effectRef idx="0">
+        <a:scrgbClr r="0" g="0" b="0"/>
+      </a:effectRef>
+      <a:fontRef idx="minor">
+        <a:schemeClr val="lt1"/>
+      </a:fontRef>
+    </dgm:style>
+  </dgm:styleLbl>
+  <dgm:styleLbl name="parChTrans1D1">
+    <dgm:scene3d>
+      <a:camera prst="orthographicFront"/>
+      <a:lightRig rig="threePt" dir="t"/>
+    </dgm:scene3d>
+    <dgm:sp3d/>
+    <dgm:txPr/>
+    <dgm:style>
+      <a:lnRef idx="2">
+        <a:scrgbClr r="0" g="0" b="0"/>
+      </a:lnRef>
+      <a:fillRef idx="0">
+        <a:scrgbClr r="0" g="0" b="0"/>
+      </a:fillRef>
+      <a:effectRef idx="0">
+        <a:scrgbClr r="0" g="0" b="0"/>
+      </a:effectRef>
+      <a:fontRef idx="minor"/>
+    </dgm:style>
+  </dgm:styleLbl>
+  <dgm:styleLbl name="parChTrans1D2">
+    <dgm:scene3d>
+      <a:camera prst="orthographicFront"/>
+      <a:lightRig rig="threePt" dir="t"/>
+    </dgm:scene3d>
+    <dgm:sp3d/>
+    <dgm:txPr/>
+    <dgm:style>
+      <a:lnRef idx="2">
+        <a:scrgbClr r="0" g="0" b="0"/>
+      </a:lnRef>
+      <a:fillRef idx="0">
+        <a:scrgbClr r="0" g="0" b="0"/>
+      </a:fillRef>
+      <a:effectRef idx="0">
+        <a:scrgbClr r="0" g="0" b="0"/>
+      </a:effectRef>
+      <a:fontRef idx="minor"/>
+    </dgm:style>
+  </dgm:styleLbl>
+  <dgm:styleLbl name="parChTrans1D3">
+    <dgm:scene3d>
+      <a:camera prst="orthographicFront"/>
+      <a:lightRig rig="threePt" dir="t"/>
+    </dgm:scene3d>
+    <dgm:sp3d/>
+    <dgm:txPr/>
+    <dgm:style>
+      <a:lnRef idx="2">
+        <a:scrgbClr r="0" g="0" b="0"/>
+      </a:lnRef>
+      <a:fillRef idx="0">
+        <a:scrgbClr r="0" g="0" b="0"/>
+      </a:fillRef>
+      <a:effectRef idx="0">
+        <a:scrgbClr r="0" g="0" b="0"/>
+      </a:effectRef>
+      <a:fontRef idx="minor"/>
+    </dgm:style>
+  </dgm:styleLbl>
+  <dgm:styleLbl name="parChTrans1D4">
+    <dgm:scene3d>
+      <a:camera prst="orthographicFront"/>
+      <a:lightRig rig="threePt" dir="t"/>
+    </dgm:scene3d>
+    <dgm:sp3d/>
+    <dgm:txPr/>
+    <dgm:style>
+      <a:lnRef idx="2">
+        <a:scrgbClr r="0" g="0" b="0"/>
+      </a:lnRef>
+      <a:fillRef idx="0">
+        <a:scrgbClr r="0" g="0" b="0"/>
+      </a:fillRef>
+      <a:effectRef idx="0">
+        <a:scrgbClr r="0" g="0" b="0"/>
+      </a:effectRef>
+      <a:fontRef idx="minor"/>
+    </dgm:style>
+  </dgm:styleLbl>
+  <dgm:styleLbl name="fgAcc1">
+    <dgm:scene3d>
+      <a:camera prst="orthographicFront"/>
+      <a:lightRig rig="threePt" dir="t"/>
+    </dgm:scene3d>
+    <dgm:sp3d/>
+    <dgm:txPr/>
+    <dgm:style>
+      <a:lnRef idx="2">
+        <a:scrgbClr r="0" g="0" b="0"/>
+      </a:lnRef>
+      <a:fillRef idx="1">
+        <a:scrgbClr r="0" g="0" b="0"/>
+      </a:fillRef>
+      <a:effectRef idx="0">
+        <a:scrgbClr r="0" g="0" b="0"/>
+      </a:effectRef>
+      <a:fontRef idx="minor"/>
+    </dgm:style>
+  </dgm:styleLbl>
+  <dgm:styleLbl name="conFgAcc1">
+    <dgm:scene3d>
+      <a:camera prst="orthographicFront"/>
+      <a:lightRig rig="threePt" dir="t"/>
+    </dgm:scene3d>
+    <dgm:sp3d/>
+    <dgm:txPr/>
+    <dgm:style>
+      <a:lnRef idx="2">
+        <a:scrgbClr r="0" g="0" b="0"/>
+      </a:lnRef>
+      <a:fillRef idx="1">
+        <a:scrgbClr r="0" g="0" b="0"/>
+      </a:fillRef>
+      <a:effectRef idx="0">
+        <a:scrgbClr r="0" g="0" b="0"/>
+      </a:effectRef>
+      <a:fontRef idx="minor"/>
+    </dgm:style>
+  </dgm:styleLbl>
+  <dgm:styleLbl name="alignAcc1">
+    <dgm:scene3d>
+      <a:camera prst="orthographicFront"/>
+      <a:lightRig rig="threePt" dir="t"/>
+    </dgm:scene3d>
+    <dgm:sp3d/>
+    <dgm:txPr/>
+    <dgm:style>
+      <a:lnRef idx="2">
+        <a:scrgbClr r="0" g="0" b="0"/>
+      </a:lnRef>
+      <a:fillRef idx="1">
+        <a:scrgbClr r="0" g="0" b="0"/>
+      </a:fillRef>
+      <a:effectRef idx="0">
+        <a:scrgbClr r="0" g="0" b="0"/>
+      </a:effectRef>
+      <a:fontRef idx="minor"/>
+    </dgm:style>
+  </dgm:styleLbl>
+  <dgm:styleLbl name="trAlignAcc1">
+    <dgm:scene3d>
+      <a:camera prst="orthographicFront"/>
+      <a:lightRig rig="threePt" dir="t"/>
+    </dgm:scene3d>
+    <dgm:sp3d/>
+    <dgm:txPr/>
+    <dgm:style>
+      <a:lnRef idx="1">
+        <a:scrgbClr r="0" g="0" b="0"/>
+      </a:lnRef>
+      <a:fillRef idx="1">
+        <a:scrgbClr r="0" g="0" b="0"/>
+      </a:fillRef>
+      <a:effectRef idx="0">
+        <a:scrgbClr r="0" g="0" b="0"/>
+      </a:effectRef>
+      <a:fontRef idx="minor"/>
+    </dgm:style>
+  </dgm:styleLbl>
+  <dgm:styleLbl name="bgAcc1">
+    <dgm:scene3d>
+      <a:camera prst="orthographicFront"/>
+      <a:lightRig rig="threePt" dir="t"/>
+    </dgm:scene3d>
+    <dgm:sp3d/>
+    <dgm:txPr/>
+    <dgm:style>
+      <a:lnRef idx="2">
+        <a:scrgbClr r="0" g="0" b="0"/>
+      </a:lnRef>
+      <a:fillRef idx="1">
+        <a:scrgbClr r="0" g="0" b="0"/>
+      </a:fillRef>
+      <a:effectRef idx="0">
+        <a:scrgbClr r="0" g="0" b="0"/>
+      </a:effectRef>
+      <a:fontRef idx="minor"/>
+    </dgm:style>
+  </dgm:styleLbl>
+  <dgm:styleLbl name="solidFgAcc1">
+    <dgm:scene3d>
+      <a:camera prst="orthographicFront"/>
+      <a:lightRig rig="threePt" dir="t"/>
+    </dgm:scene3d>
+    <dgm:sp3d/>
+    <dgm:txPr/>
+    <dgm:style>
+      <a:lnRef idx="2">
+        <a:scrgbClr r="0" g="0" b="0"/>
+      </a:lnRef>
+      <a:fillRef idx="1">
+        <a:scrgbClr r="0" g="0" b="0"/>
+      </a:fillRef>
+      <a:effectRef idx="0">
+        <a:scrgbClr r="0" g="0" b="0"/>
+      </a:effectRef>
+      <a:fontRef idx="minor"/>
+    </dgm:style>
+  </dgm:styleLbl>
+  <dgm:styleLbl name="solidAlignAcc1">
+    <dgm:scene3d>
+      <a:camera prst="orthographicFront"/>
+      <a:lightRig rig="threePt" dir="t"/>
+    </dgm:scene3d>
+    <dgm:sp3d/>
+    <dgm:txPr/>
+    <dgm:style>
+      <a:lnRef idx="2">
+        <a:scrgbClr r="0" g="0" b="0"/>
+      </a:lnRef>
+      <a:fillRef idx="1">
+        <a:scrgbClr r="0" g="0" b="0"/>
+      </a:fillRef>
+      <a:effectRef idx="0">
+        <a:scrgbClr r="0" g="0" b="0"/>
+      </a:effectRef>
+      <a:fontRef idx="minor"/>
+    </dgm:style>
+  </dgm:styleLbl>
+  <dgm:styleLbl name="solidBgAcc1">
+    <dgm:scene3d>
+      <a:camera prst="orthographicFront"/>
+      <a:lightRig rig="threePt" dir="t"/>
+    </dgm:scene3d>
+    <dgm:sp3d/>
+    <dgm:txPr/>
+    <dgm:style>
+      <a:lnRef idx="2">
+        <a:scrgbClr r="0" g="0" b="0"/>
+      </a:lnRef>
+      <a:fillRef idx="1">
+        <a:scrgbClr r="0" g="0" b="0"/>
+      </a:fillRef>
+      <a:effectRef idx="0">
+        <a:scrgbClr r="0" g="0" b="0"/>
+      </a:effectRef>
+      <a:fontRef idx="minor"/>
+    </dgm:style>
+  </dgm:styleLbl>
+  <dgm:styleLbl name="fgAccFollowNode1">
+    <dgm:scene3d>
+      <a:camera prst="orthographicFront"/>
+      <a:lightRig rig="threePt" dir="t"/>
+    </dgm:scene3d>
+    <dgm:sp3d/>
+    <dgm:txPr/>
+    <dgm:style>
+      <a:lnRef idx="2">
+        <a:scrgbClr r="0" g="0" b="0"/>
+      </a:lnRef>
+      <a:fillRef idx="1">
+        <a:scrgbClr r="0" g="0" b="0"/>
+      </a:fillRef>
+      <a:effectRef idx="0">
+        <a:scrgbClr r="0" g="0" b="0"/>
+      </a:effectRef>
+      <a:fontRef idx="minor"/>
+    </dgm:style>
+  </dgm:styleLbl>
+  <dgm:styleLbl name="alignAccFollowNode1">
+    <dgm:scene3d>
+      <a:camera prst="orthographicFront"/>
+      <a:lightRig rig="threePt" dir="t"/>
+    </dgm:scene3d>
+    <dgm:sp3d/>
+    <dgm:txPr/>
+    <dgm:style>
+      <a:lnRef idx="2">
+        <a:scrgbClr r="0" g="0" b="0"/>
+      </a:lnRef>
+      <a:fillRef idx="1">
+        <a:scrgbClr r="0" g="0" b="0"/>
+      </a:fillRef>
+      <a:effectRef idx="0">
+        <a:scrgbClr r="0" g="0" b="0"/>
+      </a:effectRef>
+      <a:fontRef idx="minor"/>
+    </dgm:style>
+  </dgm:styleLbl>
+  <dgm:styleLbl name="bgAccFollowNode1">
+    <dgm:scene3d>
+      <a:camera prst="orthographicFront"/>
+      <a:lightRig rig="threePt" dir="t"/>
+    </dgm:scene3d>
+    <dgm:sp3d/>
+    <dgm:txPr/>
+    <dgm:style>
+      <a:lnRef idx="2">
+        <a:scrgbClr r="0" g="0" b="0"/>
+      </a:lnRef>
+      <a:fillRef idx="1">
+        <a:scrgbClr r="0" g="0" b="0"/>
+      </a:fillRef>
+      <a:effectRef idx="0">
+        <a:scrgbClr r="0" g="0" b="0"/>
+      </a:effectRef>
+      <a:fontRef idx="minor"/>
+    </dgm:style>
+  </dgm:styleLbl>
+  <dgm:styleLbl name="fgAcc0">
+    <dgm:scene3d>
+      <a:camera prst="orthographicFront"/>
+      <a:lightRig rig="threePt" dir="t"/>
+    </dgm:scene3d>
+    <dgm:sp3d/>
+    <dgm:txPr/>
+    <dgm:style>
+      <a:lnRef idx="2">
+        <a:scrgbClr r="0" g="0" b="0"/>
+      </a:lnRef>
+      <a:fillRef idx="1">
+        <a:scrgbClr r="0" g="0" b="0"/>
+      </a:fillRef>
+      <a:effectRef idx="0">
+        <a:scrgbClr r="0" g="0" b="0"/>
+      </a:effectRef>
+      <a:fontRef idx="minor"/>
+    </dgm:style>
+  </dgm:styleLbl>
+  <dgm:styleLbl name="fgAcc2">
+    <dgm:scene3d>
+      <a:camera prst="orthographicFront"/>
+      <a:lightRig rig="threePt" dir="t"/>
+    </dgm:scene3d>
+    <dgm:sp3d/>
+    <dgm:txPr/>
+    <dgm:style>
+      <a:lnRef idx="2">
+        <a:scrgbClr r="0" g="0" b="0"/>
+      </a:lnRef>
+      <a:fillRef idx="1">
+        <a:scrgbClr r="0" g="0" b="0"/>
+      </a:fillRef>
+      <a:effectRef idx="0">
+        <a:scrgbClr r="0" g="0" b="0"/>
+      </a:effectRef>
+      <a:fontRef idx="minor"/>
+    </dgm:style>
+  </dgm:styleLbl>
+  <dgm:styleLbl name="fgAcc3">
+    <dgm:scene3d>
+      <a:camera prst="orthographicFront"/>
+      <a:lightRig rig="threePt" dir="t"/>
+    </dgm:scene3d>
+    <dgm:sp3d/>
+    <dgm:txPr/>
+    <dgm:style>
+      <a:lnRef idx="2">
+        <a:scrgbClr r="0" g="0" b="0"/>
+      </a:lnRef>
+      <a:fillRef idx="1">
+        <a:scrgbClr r="0" g="0" b="0"/>
+      </a:fillRef>
+      <a:effectRef idx="0">
+        <a:scrgbClr r="0" g="0" b="0"/>
+      </a:effectRef>
+      <a:fontRef idx="minor"/>
+    </dgm:style>
+  </dgm:styleLbl>
+  <dgm:styleLbl name="fgAcc4">
+    <dgm:scene3d>
+      <a:camera prst="orthographicFront"/>
+      <a:lightRig rig="threePt" dir="t"/>
+    </dgm:scene3d>
+    <dgm:sp3d/>
+    <dgm:txPr/>
+    <dgm:style>
+      <a:lnRef idx="2">
+        <a:scrgbClr r="0" g="0" b="0"/>
+      </a:lnRef>
+      <a:fillRef idx="1">
+        <a:scrgbClr r="0" g="0" b="0"/>
+      </a:fillRef>
+      <a:effectRef idx="0">
+        <a:scrgbClr r="0" g="0" b="0"/>
+      </a:effectRef>
+      <a:fontRef idx="minor"/>
+    </dgm:style>
+  </dgm:styleLbl>
+  <dgm:styleLbl name="bgShp">
+    <dgm:scene3d>
+      <a:camera prst="orthographicFront"/>
+      <a:lightRig rig="threePt" dir="t"/>
+    </dgm:scene3d>
+    <dgm:sp3d/>
+    <dgm:txPr/>
+    <dgm:style>
+      <a:lnRef idx="0">
+        <a:scrgbClr r="0" g="0" b="0"/>
+      </a:lnRef>
+      <a:fillRef idx="1">
+        <a:scrgbClr r="0" g="0" b="0"/>
+      </a:fillRef>
+      <a:effectRef idx="0">
+        <a:scrgbClr r="0" g="0" b="0"/>
+      </a:effectRef>
+      <a:fontRef idx="minor"/>
+    </dgm:style>
+  </dgm:styleLbl>
+  <dgm:styleLbl name="dkBgShp">
+    <dgm:scene3d>
+      <a:camera prst="orthographicFront"/>
+      <a:lightRig rig="threePt" dir="t"/>
+    </dgm:scene3d>
+    <dgm:sp3d/>
+    <dgm:txPr/>
+    <dgm:style>
+      <a:lnRef idx="0">
+        <a:scrgbClr r="0" g="0" b="0"/>
+      </a:lnRef>
+      <a:fillRef idx="1">
+        <a:scrgbClr r="0" g="0" b="0"/>
+      </a:fillRef>
+      <a:effectRef idx="0">
+        <a:scrgbClr r="0" g="0" b="0"/>
+      </a:effectRef>
+      <a:fontRef idx="minor"/>
+    </dgm:style>
+  </dgm:styleLbl>
+  <dgm:styleLbl name="trBgShp">
+    <dgm:scene3d>
+      <a:camera prst="orthographicFront"/>
+      <a:lightRig rig="threePt" dir="t"/>
+    </dgm:scene3d>
+    <dgm:sp3d/>
+    <dgm:txPr/>
+    <dgm:style>
+      <a:lnRef idx="0">
+        <a:scrgbClr r="0" g="0" b="0"/>
+      </a:lnRef>
+      <a:fillRef idx="1">
+        <a:scrgbClr r="0" g="0" b="0"/>
+      </a:fillRef>
+      <a:effectRef idx="0">
+        <a:scrgbClr r="0" g="0" b="0"/>
+      </a:effectRef>
+      <a:fontRef idx="minor"/>
+    </dgm:style>
+  </dgm:styleLbl>
+  <dgm:styleLbl name="fgShp">
+    <dgm:scene3d>
+      <a:camera prst="orthographicFront"/>
+      <a:lightRig rig="threePt" dir="t"/>
+    </dgm:scene3d>
+    <dgm:sp3d/>
+    <dgm:txPr/>
+    <dgm:style>
+      <a:lnRef idx="2">
+        <a:scrgbClr r="0" g="0" b="0"/>
+      </a:lnRef>
+      <a:fillRef idx="1">
+        <a:scrgbClr r="0" g="0" b="0"/>
+      </a:fillRef>
+      <a:effectRef idx="0">
+        <a:scrgbClr r="0" g="0" b="0"/>
+      </a:effectRef>
+      <a:fontRef idx="minor"/>
+    </dgm:style>
+  </dgm:styleLbl>
+  <dgm:styleLbl name="revTx">
+    <dgm:scene3d>
+      <a:camera prst="orthographicFront"/>
+      <a:lightRig rig="threePt" dir="t"/>
+    </dgm:scene3d>
+    <dgm:sp3d/>
+    <dgm:txPr/>
+    <dgm:style>
+      <a:lnRef idx="0">
+        <a:scrgbClr r="0" g="0" b="0"/>
+      </a:lnRef>
+      <a:fillRef idx="0">
+        <a:scrgbClr r="0" g="0" b="0"/>
+      </a:fillRef>
+      <a:effectRef idx="0">
+        <a:scrgbClr r="0" g="0" b="0"/>
+      </a:effectRef>
+      <a:fontRef idx="minor"/>
+    </dgm:style>
+  </dgm:styleLbl>
+</dgm:styleDef>
+</file>
+
 <file path=ppt/slideLayouts/slideLayout1.xml><?xml version="1.0" encoding="utf-8"?>
 <p:sldLayout xmlns:a="http://schemas.openxmlformats.org/drawingml/2006/main" xmlns:r="http://schemas.openxmlformats.org/officeDocument/2006/relationships" xmlns:p="http://schemas.openxmlformats.org/presentationml/2006/main" type="title" preserve="1">
   <p:cSld name="Title Slide">
@@ -6058,7 +9176,7 @@
           <a:p>
             <a:fld id="{00FC3468-774A-43C8-A101-0CC3E916CA0F}" type="datetimeFigureOut">
               <a:rPr lang="en-US" smtClean="0"/>
-              <a:t>2/15/2026</a:t>
+              <a:t>2/16/2026</a:t>
             </a:fld>
             <a:endParaRPr lang="en-US"/>
           </a:p>
@@ -6333,7 +9451,7 @@
           <a:p>
             <a:fld id="{00FC3468-774A-43C8-A101-0CC3E916CA0F}" type="datetimeFigureOut">
               <a:rPr lang="en-US" smtClean="0"/>
-              <a:t>2/15/2026</a:t>
+              <a:t>2/16/2026</a:t>
             </a:fld>
             <a:endParaRPr lang="en-US"/>
           </a:p>
@@ -6527,7 +9645,7 @@
           <a:p>
             <a:fld id="{00FC3468-774A-43C8-A101-0CC3E916CA0F}" type="datetimeFigureOut">
               <a:rPr lang="en-US" smtClean="0"/>
-              <a:t>2/15/2026</a:t>
+              <a:t>2/16/2026</a:t>
             </a:fld>
             <a:endParaRPr lang="en-US"/>
           </a:p>
@@ -6800,7 +9918,7 @@
           <a:p>
             <a:fld id="{00FC3468-774A-43C8-A101-0CC3E916CA0F}" type="datetimeFigureOut">
               <a:rPr lang="en-US" smtClean="0"/>
-              <a:t>2/15/2026</a:t>
+              <a:t>2/16/2026</a:t>
             </a:fld>
             <a:endParaRPr lang="en-US"/>
           </a:p>
@@ -7141,7 +10259,7 @@
           <a:p>
             <a:fld id="{00FC3468-774A-43C8-A101-0CC3E916CA0F}" type="datetimeFigureOut">
               <a:rPr lang="en-US" smtClean="0"/>
-              <a:t>2/15/2026</a:t>
+              <a:t>2/16/2026</a:t>
             </a:fld>
             <a:endParaRPr lang="en-US"/>
           </a:p>
@@ -7764,7 +10882,7 @@
           <a:p>
             <a:fld id="{00FC3468-774A-43C8-A101-0CC3E916CA0F}" type="datetimeFigureOut">
               <a:rPr lang="en-US" smtClean="0"/>
-              <a:t>2/15/2026</a:t>
+              <a:t>2/16/2026</a:t>
             </a:fld>
             <a:endParaRPr lang="en-US"/>
           </a:p>
@@ -8624,7 +11742,7 @@
           <a:p>
             <a:fld id="{00FC3468-774A-43C8-A101-0CC3E916CA0F}" type="datetimeFigureOut">
               <a:rPr lang="en-US" smtClean="0"/>
-              <a:t>2/15/2026</a:t>
+              <a:t>2/16/2026</a:t>
             </a:fld>
             <a:endParaRPr lang="en-US"/>
           </a:p>
@@ -8794,7 +11912,7 @@
           <a:p>
             <a:fld id="{00FC3468-774A-43C8-A101-0CC3E916CA0F}" type="datetimeFigureOut">
               <a:rPr lang="en-US" smtClean="0"/>
-              <a:t>2/15/2026</a:t>
+              <a:t>2/16/2026</a:t>
             </a:fld>
             <a:endParaRPr lang="en-US"/>
           </a:p>
@@ -8974,7 +12092,7 @@
           <a:p>
             <a:fld id="{00FC3468-774A-43C8-A101-0CC3E916CA0F}" type="datetimeFigureOut">
               <a:rPr lang="en-US" smtClean="0"/>
-              <a:t>2/15/2026</a:t>
+              <a:t>2/16/2026</a:t>
             </a:fld>
             <a:endParaRPr lang="en-US"/>
           </a:p>
@@ -9144,7 +12262,7 @@
           <a:p>
             <a:fld id="{00FC3468-774A-43C8-A101-0CC3E916CA0F}" type="datetimeFigureOut">
               <a:rPr lang="en-US" smtClean="0"/>
-              <a:t>2/15/2026</a:t>
+              <a:t>2/16/2026</a:t>
             </a:fld>
             <a:endParaRPr lang="en-US"/>
           </a:p>
@@ -9391,7 +12509,7 @@
           <a:p>
             <a:fld id="{00FC3468-774A-43C8-A101-0CC3E916CA0F}" type="datetimeFigureOut">
               <a:rPr lang="en-US" smtClean="0"/>
-              <a:t>2/15/2026</a:t>
+              <a:t>2/16/2026</a:t>
             </a:fld>
             <a:endParaRPr lang="en-US"/>
           </a:p>
@@ -9683,7 +12801,7 @@
           <a:p>
             <a:fld id="{00FC3468-774A-43C8-A101-0CC3E916CA0F}" type="datetimeFigureOut">
               <a:rPr lang="en-US" smtClean="0"/>
-              <a:t>2/15/2026</a:t>
+              <a:t>2/16/2026</a:t>
             </a:fld>
             <a:endParaRPr lang="en-US"/>
           </a:p>
@@ -10127,7 +13245,7 @@
           <a:p>
             <a:fld id="{00FC3468-774A-43C8-A101-0CC3E916CA0F}" type="datetimeFigureOut">
               <a:rPr lang="en-US" smtClean="0"/>
-              <a:t>2/15/2026</a:t>
+              <a:t>2/16/2026</a:t>
             </a:fld>
             <a:endParaRPr lang="en-US"/>
           </a:p>
@@ -10245,7 +13363,7 @@
           <a:p>
             <a:fld id="{00FC3468-774A-43C8-A101-0CC3E916CA0F}" type="datetimeFigureOut">
               <a:rPr lang="en-US" smtClean="0"/>
-              <a:t>2/15/2026</a:t>
+              <a:t>2/16/2026</a:t>
             </a:fld>
             <a:endParaRPr lang="en-US"/>
           </a:p>
@@ -10340,7 +13458,7 @@
           <a:p>
             <a:fld id="{00FC3468-774A-43C8-A101-0CC3E916CA0F}" type="datetimeFigureOut">
               <a:rPr lang="en-US" smtClean="0"/>
-              <a:t>2/15/2026</a:t>
+              <a:t>2/16/2026</a:t>
             </a:fld>
             <a:endParaRPr lang="en-US"/>
           </a:p>
@@ -10619,7 +13737,7 @@
           <a:p>
             <a:fld id="{00FC3468-774A-43C8-A101-0CC3E916CA0F}" type="datetimeFigureOut">
               <a:rPr lang="en-US" smtClean="0"/>
-              <a:t>2/15/2026</a:t>
+              <a:t>2/16/2026</a:t>
             </a:fld>
             <a:endParaRPr lang="en-US"/>
           </a:p>
@@ -10894,7 +14012,7 @@
           <a:p>
             <a:fld id="{00FC3468-774A-43C8-A101-0CC3E916CA0F}" type="datetimeFigureOut">
               <a:rPr lang="en-US" smtClean="0"/>
-              <a:t>2/15/2026</a:t>
+              <a:t>2/16/2026</a:t>
             </a:fld>
             <a:endParaRPr lang="en-US"/>
           </a:p>
@@ -11097,6 +14215,13 @@
             <a:schemeClr val="lt1"/>
           </a:fontRef>
         </p:style>
+        <p:txBody>
+          <a:bodyPr/>
+          <a:lstStyle/>
+          <a:p>
+            <a:endParaRPr lang="en-US"/>
+          </a:p>
+        </p:txBody>
       </p:sp>
       <p:pic>
         <p:nvPicPr>
@@ -11191,6 +14316,13 @@
             <a:schemeClr val="lt1"/>
           </a:fontRef>
         </p:style>
+        <p:txBody>
+          <a:bodyPr/>
+          <a:lstStyle/>
+          <a:p>
+            <a:endParaRPr lang="en-US"/>
+          </a:p>
+        </p:txBody>
       </p:sp>
       <p:sp>
         <p:nvSpPr>
@@ -11323,7 +14455,7 @@
           <a:p>
             <a:fld id="{00FC3468-774A-43C8-A101-0CC3E916CA0F}" type="datetimeFigureOut">
               <a:rPr lang="en-US" smtClean="0"/>
-              <a:t>2/15/2026</a:t>
+              <a:t>2/16/2026</a:t>
             </a:fld>
             <a:endParaRPr lang="en-US"/>
           </a:p>
@@ -13120,6 +16252,100 @@
 </file>
 
 <file path=ppt/slides/slide4.xml><?xml version="1.0" encoding="utf-8"?>
+<p:sld xmlns:a="http://schemas.openxmlformats.org/drawingml/2006/main" xmlns:r="http://schemas.openxmlformats.org/officeDocument/2006/relationships" xmlns:p="http://schemas.openxmlformats.org/presentationml/2006/main">
+  <p:cSld>
+    <p:spTree>
+      <p:nvGrpSpPr>
+        <p:cNvPr id="1" name=""/>
+        <p:cNvGrpSpPr/>
+        <p:nvPr/>
+      </p:nvGrpSpPr>
+      <p:grpSpPr>
+        <a:xfrm>
+          <a:off x="0" y="0"/>
+          <a:ext cx="0" cy="0"/>
+          <a:chOff x="0" y="0"/>
+          <a:chExt cx="0" cy="0"/>
+        </a:xfrm>
+      </p:grpSpPr>
+      <p:sp>
+        <p:nvSpPr>
+          <p:cNvPr id="2" name="Title 1">
+            <a:extLst>
+              <a:ext uri="{FF2B5EF4-FFF2-40B4-BE49-F238E27FC236}">
+                <a16:creationId xmlns:a16="http://schemas.microsoft.com/office/drawing/2014/main" id="{07B62DF8-DF8C-4B9F-E5E0-3F2A84E99882}"/>
+              </a:ext>
+            </a:extLst>
+          </p:cNvPr>
+          <p:cNvSpPr>
+            <a:spLocks noGrp="1"/>
+          </p:cNvSpPr>
+          <p:nvPr>
+            <p:ph type="title"/>
+          </p:nvPr>
+        </p:nvSpPr>
+        <p:spPr/>
+        <p:txBody>
+          <a:bodyPr/>
+          <a:lstStyle/>
+          <a:p>
+            <a:pPr algn="ctr"/>
+            <a:r>
+              <a:rPr lang="en-US" sz="4400" b="1" dirty="0">
+                <a:latin typeface="Calibri" panose="020F0502020204030204" pitchFamily="34" charset="0"/>
+                <a:ea typeface="Calibri" panose="020F0502020204030204" pitchFamily="34" charset="0"/>
+                <a:cs typeface="Calibri" panose="020F0502020204030204" pitchFamily="34" charset="0"/>
+              </a:rPr>
+              <a:t>Design Decisions &amp; Tradeoffs</a:t>
+            </a:r>
+          </a:p>
+        </p:txBody>
+      </p:sp>
+      <p:graphicFrame>
+        <p:nvGraphicFramePr>
+          <p:cNvPr id="5" name="Content Placeholder 4">
+            <a:extLst>
+              <a:ext uri="{FF2B5EF4-FFF2-40B4-BE49-F238E27FC236}">
+                <a16:creationId xmlns:a16="http://schemas.microsoft.com/office/drawing/2014/main" id="{F893F76C-A779-8C60-EA13-73E21C561C2E}"/>
+              </a:ext>
+            </a:extLst>
+          </p:cNvPr>
+          <p:cNvGraphicFramePr>
+            <a:graphicFrameLocks noGrp="1"/>
+          </p:cNvGraphicFramePr>
+          <p:nvPr>
+            <p:ph idx="1"/>
+            <p:extLst>
+              <p:ext uri="{D42A27DB-BD31-4B8C-83A1-F6EECF244321}">
+                <p14:modId xmlns:p14="http://schemas.microsoft.com/office/powerpoint/2010/main" val="792371026"/>
+              </p:ext>
+            </p:extLst>
+          </p:nvPr>
+        </p:nvGraphicFramePr>
+        <p:xfrm>
+          <a:off x="1103312" y="1563624"/>
+          <a:ext cx="8946541" cy="4992624"/>
+        </p:xfrm>
+        <a:graphic>
+          <a:graphicData uri="http://schemas.openxmlformats.org/drawingml/2006/diagram">
+            <dgm:relIds xmlns:dgm="http://schemas.openxmlformats.org/drawingml/2006/diagram" xmlns:r="http://schemas.openxmlformats.org/officeDocument/2006/relationships" r:dm="rId2" r:lo="rId3" r:qs="rId4" r:cs="rId5"/>
+          </a:graphicData>
+        </a:graphic>
+      </p:graphicFrame>
+    </p:spTree>
+    <p:extLst>
+      <p:ext uri="{BB962C8B-B14F-4D97-AF65-F5344CB8AC3E}">
+        <p14:creationId xmlns:p14="http://schemas.microsoft.com/office/powerpoint/2010/main" val="1510111511"/>
+      </p:ext>
+    </p:extLst>
+  </p:cSld>
+  <p:clrMapOvr>
+    <a:masterClrMapping/>
+  </p:clrMapOvr>
+</p:sld>
+</file>
+
+<file path=ppt/slides/slide5.xml><?xml version="1.0" encoding="utf-8"?>
 <p:sld xmlns:a="http://schemas.openxmlformats.org/drawingml/2006/main" xmlns:r="http://schemas.openxmlformats.org/officeDocument/2006/relationships" xmlns:p="http://schemas.openxmlformats.org/presentationml/2006/main">
   <p:cSld>
     <p:spTree>
@@ -14374,7 +17600,7 @@
 </p:sld>
 </file>
 
-<file path=ppt/slides/slide5.xml><?xml version="1.0" encoding="utf-8"?>
+<file path=ppt/slides/slide6.xml><?xml version="1.0" encoding="utf-8"?>
 <p:sld xmlns:a="http://schemas.openxmlformats.org/drawingml/2006/main" xmlns:r="http://schemas.openxmlformats.org/officeDocument/2006/relationships" xmlns:p="http://schemas.openxmlformats.org/presentationml/2006/main">
   <p:cSld>
     <p:spTree>
@@ -14471,7 +17697,7 @@
 </p:sld>
 </file>
 
-<file path=ppt/slides/slide6.xml><?xml version="1.0" encoding="utf-8"?>
+<file path=ppt/slides/slide7.xml><?xml version="1.0" encoding="utf-8"?>
 <p:sld xmlns:a="http://schemas.openxmlformats.org/drawingml/2006/main" xmlns:r="http://schemas.openxmlformats.org/officeDocument/2006/relationships" xmlns:p="http://schemas.openxmlformats.org/presentationml/2006/main">
   <p:cSld>
     <p:spTree>
@@ -15285,7 +18511,7 @@
 </p:sld>
 </file>
 
-<file path=ppt/slides/slide7.xml><?xml version="1.0" encoding="utf-8"?>
+<file path=ppt/slides/slide8.xml><?xml version="1.0" encoding="utf-8"?>
 <p:sld xmlns:a="http://schemas.openxmlformats.org/drawingml/2006/main" xmlns:r="http://schemas.openxmlformats.org/officeDocument/2006/relationships" xmlns:p="http://schemas.openxmlformats.org/presentationml/2006/main">
   <p:cSld>
     <p:spTree>
@@ -15461,7 +18687,7 @@
 </p:sld>
 </file>
 
-<file path=ppt/slides/slide8.xml><?xml version="1.0" encoding="utf-8"?>
+<file path=ppt/slides/slide9.xml><?xml version="1.0" encoding="utf-8"?>
 <p:sld xmlns:a="http://schemas.openxmlformats.org/drawingml/2006/main" xmlns:r="http://schemas.openxmlformats.org/officeDocument/2006/relationships" xmlns:p="http://schemas.openxmlformats.org/presentationml/2006/main">
   <p:cSld>
     <p:bg>
